--- a/yocto_training_all_session_decks/session_decks/D2S7_HandsOn.pptx
+++ b/yocto_training_all_session_decks/session_decks/D2S7_HandsOn.pptx
@@ -5,24 +5,24 @@
     <p:sldMasterId id="2147483648" r:id="rId1"/>
   </p:sldMasterIdLst>
   <p:notesMasterIdLst>
-    <p:notesMasterId r:id="rId8"/>
+    <p:notesMasterId r:id="rId9"/>
   </p:notesMasterIdLst>
   <p:handoutMasterIdLst>
-    <p:handoutMasterId r:id="rId9"/>
+    <p:handoutMasterId r:id="rId10"/>
   </p:handoutMasterIdLst>
   <p:sldIdLst>
-    <p:sldId id="1007" r:id="rId18"/>
-    <p:sldId id="1008" r:id="rId19"/>
-    <p:sldId id="1009" r:id="rId20"/>
-    <p:sldId id="1010" r:id="rId21"/>
-    <p:sldId id="1011" r:id="rId22"/>
-    <p:sldId id="1012" r:id="rId23"/>
-    <p:sldId id="1013" r:id="rId24"/>
+    <p:sldId id="1007" r:id="rId2"/>
+    <p:sldId id="1008" r:id="rId3"/>
+    <p:sldId id="1009" r:id="rId4"/>
+    <p:sldId id="1010" r:id="rId5"/>
+    <p:sldId id="1011" r:id="rId6"/>
+    <p:sldId id="1012" r:id="rId7"/>
+    <p:sldId id="1013" r:id="rId8"/>
   </p:sldIdLst>
   <p:sldSz cx="12192000" cy="6858000"/>
   <p:notesSz cx="6858000" cy="9144000"/>
   <p:custDataLst>
-    <p:tags r:id="rId10"/>
+    <p:tags r:id="rId11"/>
   </p:custDataLst>
   <p:defaultTextStyle>
     <a:defPPr>
@@ -2928,7 +2928,7 @@
           <a:p>
             <a:fld id="{0CEC647C-F50C-4F78-AA33-D7AA6CDA18EE}" type="datetimeFigureOut">
               <a:rPr lang="en-US" smtClean="0"/>
-              <a:t>7/13/2025</a:t>
+              <a:t>6/10/2026</a:t>
             </a:fld>
             <a:endParaRPr lang="en-US"/>
           </a:p>
@@ -3093,7 +3093,7 @@
           <a:p>
             <a:fld id="{3A83341F-E62C-483B-84B4-966F8BE46097}" type="datetimeFigureOut">
               <a:rPr lang="en-US" smtClean="0"/>
-              <a:t>7/13/2025</a:t>
+              <a:t>6/10/2026</a:t>
             </a:fld>
             <a:endParaRPr lang="en-US"/>
           </a:p>
@@ -5177,8 +5177,8 @@
 </p:sldMaster>
 </file>
 
-<file path=ppt/slides/slide10.xml><?xml version="1.0" encoding="utf-8"?>
-<p:sld xmlns:a="http://schemas.openxmlformats.org/drawingml/2006/main" xmlns:p="http://schemas.openxmlformats.org/presentationml/2006/main" xmlns:r="http://schemas.openxmlformats.org/officeDocument/2006/relationships">
+<file path=ppt/slides/slide1.xml><?xml version="1.0" encoding="utf-8"?>
+<p:sld xmlns:a="http://schemas.openxmlformats.org/drawingml/2006/main" xmlns:r="http://schemas.openxmlformats.org/officeDocument/2006/relationships" xmlns:p="http://schemas.openxmlformats.org/presentationml/2006/main">
   <p:cSld>
     <p:spTree>
       <p:nvGrpSpPr>
@@ -5186,7 +5186,108 @@
         <p:cNvGrpSpPr/>
         <p:nvPr/>
       </p:nvGrpSpPr>
-      <p:grpSpPr/>
+      <p:grpSpPr>
+        <a:xfrm>
+          <a:off x="0" y="0"/>
+          <a:ext cx="0" cy="0"/>
+          <a:chOff x="0" y="0"/>
+          <a:chExt cx="0" cy="0"/>
+        </a:xfrm>
+      </p:grpSpPr>
+      <p:sp>
+        <p:nvSpPr>
+          <p:cNvPr id="2" name="Title 1"/>
+          <p:cNvSpPr>
+            <a:spLocks noGrp="1"/>
+          </p:cNvSpPr>
+          <p:nvPr>
+            <p:ph type="ctrTitle"/>
+          </p:nvPr>
+        </p:nvSpPr>
+        <p:spPr/>
+        <p:txBody>
+          <a:bodyPr/>
+          <a:lstStyle/>
+          <a:p>
+            <a:r>
+              <a:rPr sz="4400" b="1">
+                <a:solidFill>
+                  <a:srgbClr val="FFFFFF"/>
+                </a:solidFill>
+                <a:latin typeface="Calibri"/>
+              </a:rPr>
+              <a:t>Day 2 Hands-On</a:t>
+            </a:r>
+          </a:p>
+        </p:txBody>
+      </p:sp>
+      <p:sp>
+        <p:nvSpPr>
+          <p:cNvPr id="3" name="Subtitle 2"/>
+          <p:cNvSpPr>
+            <a:spLocks noGrp="1"/>
+          </p:cNvSpPr>
+          <p:nvPr>
+            <p:ph type="subTitle" idx="1"/>
+          </p:nvPr>
+        </p:nvSpPr>
+        <p:spPr/>
+        <p:txBody>
+          <a:bodyPr/>
+          <a:lstStyle/>
+          <a:p>
+            <a:r>
+              <a:rPr sz="1800" dirty="0">
+                <a:solidFill>
+                  <a:srgbClr val="FFFFFF"/>
+                </a:solidFill>
+                <a:latin typeface="Calibri"/>
+              </a:rPr>
+              <a:t>Apply recipes, debugging, and performance to </a:t>
+            </a:r>
+            <a:r>
+              <a:rPr sz="1800" dirty="0" err="1">
+                <a:solidFill>
+                  <a:srgbClr val="FFFFFF"/>
+                </a:solidFill>
+                <a:latin typeface="Calibri"/>
+              </a:rPr>
+              <a:t>TrainerGW</a:t>
+            </a:r>
+            <a:endParaRPr sz="1800" dirty="0">
+              <a:solidFill>
+                <a:srgbClr val="FFFFFF"/>
+              </a:solidFill>
+              <a:latin typeface="Calibri"/>
+            </a:endParaRPr>
+          </a:p>
+        </p:txBody>
+      </p:sp>
+    </p:spTree>
+  </p:cSld>
+  <p:clrMapOvr>
+    <a:masterClrMapping/>
+  </p:clrMapOvr>
+</p:sld>
+</file>
+
+<file path=ppt/slides/slide2.xml><?xml version="1.0" encoding="utf-8"?>
+<p:sld xmlns:a="http://schemas.openxmlformats.org/drawingml/2006/main" xmlns:r="http://schemas.openxmlformats.org/officeDocument/2006/relationships" xmlns:p="http://schemas.openxmlformats.org/presentationml/2006/main">
+  <p:cSld>
+    <p:spTree>
+      <p:nvGrpSpPr>
+        <p:cNvPr id="1" name=""/>
+        <p:cNvGrpSpPr/>
+        <p:nvPr/>
+      </p:nvGrpSpPr>
+      <p:grpSpPr>
+        <a:xfrm>
+          <a:off x="0" y="0"/>
+          <a:ext cx="0" cy="0"/>
+          <a:chOff x="0" y="0"/>
+          <a:chExt cx="0" cy="0"/>
+        </a:xfrm>
+      </p:grpSpPr>
       <p:sp>
         <p:nvSpPr>
           <p:cNvPr id="2" name="Title 1"/>
@@ -5203,13 +5304,174 @@
           <a:lstStyle/>
           <a:p>
             <a:r>
-              <a:rPr sz="3200" b="1">
-                <a:solidFill>
-                  <a:srgbClr val="CC0066"/>
-                </a:solidFill>
+              <a:rPr sz="3200" b="1" dirty="0">
                 <a:latin typeface="Calibri"/>
               </a:rPr>
-              <a:t>Step 2 — Trigger and Diagnose a Failure</a:t>
+              <a:t>Session Agenda</a:t>
+            </a:r>
+          </a:p>
+        </p:txBody>
+      </p:sp>
+      <p:sp>
+        <p:nvSpPr>
+          <p:cNvPr id="3" name="TextBox 2"/>
+          <p:cNvSpPr txBox="1"/>
+          <p:nvPr/>
+        </p:nvSpPr>
+        <p:spPr>
+          <a:xfrm>
+            <a:off x="822960" y="1463040"/>
+            <a:ext cx="10515600" cy="5029200"/>
+          </a:xfrm>
+          <a:prstGeom prst="rect">
+            <a:avLst/>
+          </a:prstGeom>
+          <a:noFill/>
+        </p:spPr>
+        <p:txBody>
+          <a:bodyPr wrap="square" lIns="45720" rIns="45720">
+            <a:spAutoFit/>
+          </a:bodyPr>
+          <a:lstStyle/>
+          <a:p>
+            <a:pPr>
+              <a:spcAft>
+                <a:spcPts val="600"/>
+              </a:spcAft>
+            </a:pPr>
+            <a:r>
+              <a:rPr sz="2000" b="0" i="0">
+                <a:solidFill>
+                  <a:srgbClr val="333333"/>
+                </a:solidFill>
+                <a:latin typeface="Calibri"/>
+              </a:rPr>
+              <a:t>1.  Add a new recipe with patches</a:t>
+            </a:r>
+          </a:p>
+          <a:p>
+            <a:pPr>
+              <a:spcAft>
+                <a:spcPts val="600"/>
+              </a:spcAft>
+            </a:pPr>
+            <a:r>
+              <a:rPr sz="2000" b="0" i="0">
+                <a:solidFill>
+                  <a:srgbClr val="333333"/>
+                </a:solidFill>
+                <a:latin typeface="Calibri"/>
+              </a:rPr>
+              <a:t>2.  Trigger a build failure deliberately</a:t>
+            </a:r>
+          </a:p>
+          <a:p>
+            <a:pPr>
+              <a:spcAft>
+                <a:spcPts val="600"/>
+              </a:spcAft>
+            </a:pPr>
+            <a:r>
+              <a:rPr sz="2000" b="0" i="0">
+                <a:solidFill>
+                  <a:srgbClr val="333333"/>
+                </a:solidFill>
+                <a:latin typeface="Calibri"/>
+              </a:rPr>
+              <a:t>3.  Diagnose and fix</a:t>
+            </a:r>
+          </a:p>
+          <a:p>
+            <a:pPr>
+              <a:spcAft>
+                <a:spcPts val="600"/>
+              </a:spcAft>
+            </a:pPr>
+            <a:r>
+              <a:rPr sz="2000" b="0" i="0">
+                <a:solidFill>
+                  <a:srgbClr val="333333"/>
+                </a:solidFill>
+                <a:latin typeface="Calibri"/>
+              </a:rPr>
+              <a:t>4.  Inspect sstate behavior</a:t>
+            </a:r>
+          </a:p>
+          <a:p>
+            <a:pPr>
+              <a:spcAft>
+                <a:spcPts val="600"/>
+              </a:spcAft>
+            </a:pPr>
+            <a:r>
+              <a:rPr sz="2000" b="0" i="0">
+                <a:solidFill>
+                  <a:srgbClr val="333333"/>
+                </a:solidFill>
+                <a:latin typeface="Calibri"/>
+              </a:rPr>
+              <a:t>5.  Switch package class and observe</a:t>
+            </a:r>
+          </a:p>
+        </p:txBody>
+      </p:sp>
+    </p:spTree>
+  </p:cSld>
+  <p:clrMapOvr>
+    <a:masterClrMapping/>
+  </p:clrMapOvr>
+</p:sld>
+</file>
+
+<file path=ppt/slides/slide3.xml><?xml version="1.0" encoding="utf-8"?>
+<p:sld xmlns:a="http://schemas.openxmlformats.org/drawingml/2006/main" xmlns:r="http://schemas.openxmlformats.org/officeDocument/2006/relationships" xmlns:p="http://schemas.openxmlformats.org/presentationml/2006/main">
+  <p:cSld>
+    <p:spTree>
+      <p:nvGrpSpPr>
+        <p:cNvPr id="1" name=""/>
+        <p:cNvGrpSpPr/>
+        <p:nvPr/>
+      </p:nvGrpSpPr>
+      <p:grpSpPr>
+        <a:xfrm>
+          <a:off x="0" y="0"/>
+          <a:ext cx="0" cy="0"/>
+          <a:chOff x="0" y="0"/>
+          <a:chExt cx="0" cy="0"/>
+        </a:xfrm>
+      </p:grpSpPr>
+      <p:sp>
+        <p:nvSpPr>
+          <p:cNvPr id="2" name="Title 1"/>
+          <p:cNvSpPr>
+            <a:spLocks noGrp="1"/>
+          </p:cNvSpPr>
+          <p:nvPr>
+            <p:ph type="title"/>
+          </p:nvPr>
+        </p:nvSpPr>
+        <p:spPr/>
+        <p:txBody>
+          <a:bodyPr/>
+          <a:lstStyle/>
+          <a:p>
+            <a:r>
+              <a:rPr sz="3200" b="1" dirty="0">
+                <a:latin typeface="Calibri"/>
+              </a:rPr>
+              <a:t>Step 1</a:t>
+            </a:r>
+            <a:r>
+              <a:rPr lang="en-IN" sz="3200" b="1" dirty="0">
+                <a:latin typeface="Calibri"/>
+              </a:rPr>
+              <a:t>: </a:t>
+            </a:r>
+            <a:r>
+              <a:rPr sz="3200" b="1" dirty="0">
+                <a:latin typeface="Calibri"/>
+              </a:rPr>
+              <a:t>Add a New Recipe With Patches</a:t>
             </a:r>
           </a:p>
         </p:txBody>
@@ -5231,7 +5493,7 @@
           <a:noFill/>
         </p:spPr>
         <p:txBody>
-          <a:bodyPr wrap="square" anchor="t" lIns="45720" rIns="45720">
+          <a:bodyPr wrap="square" lIns="45720" rIns="45720" anchor="t">
             <a:spAutoFit/>
           </a:bodyPr>
           <a:lstStyle/>
@@ -5244,7 +5506,7 @@
                 </a:solidFill>
                 <a:latin typeface="Calibri"/>
               </a:rPr>
-              <a:t>Break the recipe deliberately. Find it from the log.</a:t>
+              <a:t>Pick a real upstream project. Patch one file.</a:t>
             </a:r>
           </a:p>
         </p:txBody>
@@ -5292,6 +5554,7 @@
           <a:lstStyle/>
           <a:p>
             <a:pPr algn="ctr"/>
+            <a:endParaRPr/>
           </a:p>
         </p:txBody>
       </p:sp>
@@ -5336,6 +5599,7 @@
           <a:lstStyle/>
           <a:p>
             <a:pPr algn="ctr"/>
+            <a:endParaRPr/>
           </a:p>
         </p:txBody>
       </p:sp>
@@ -5348,7 +5612,7 @@
         <p:spPr>
           <a:xfrm>
             <a:off x="1005840" y="1874519"/>
-            <a:ext cx="10241280" cy="4389120"/>
+            <a:ext cx="10241280" cy="4493538"/>
           </a:xfrm>
           <a:prstGeom prst="rect">
             <a:avLst/>
@@ -5367,13 +5631,13 @@
               </a:spcAft>
             </a:pPr>
             <a:r>
-              <a:rPr sz="1000" i="1">
+              <a:rPr sz="1300" i="1">
                 <a:solidFill>
                   <a:srgbClr val="808080"/>
                 </a:solidFill>
                 <a:latin typeface="Consolas"/>
               </a:rPr>
-              <a:t># Edit the recipe to break it on purpose</a:t>
+              <a:t># In meta-trainerdemo, add a recipe for 'figlet' (it's small)</a:t>
             </a:r>
           </a:p>
           <a:p>
@@ -5383,13 +5647,13 @@
               </a:spcAft>
             </a:pPr>
             <a:r>
-              <a:rPr sz="1000">
+              <a:rPr sz="1300">
                 <a:solidFill>
                   <a:srgbClr val="2D2D2D"/>
                 </a:solidFill>
                 <a:latin typeface="Consolas"/>
               </a:rPr>
-              <a:t>vi ../meta-trainerdemo/recipes-trainergw/figlet/figlet_2.2.5.bb</a:t>
+              <a:t> </a:t>
             </a:r>
           </a:p>
           <a:p>
@@ -5399,13 +5663,301 @@
               </a:spcAft>
             </a:pPr>
             <a:r>
-              <a:rPr sz="1000" i="1">
+              <a:rPr sz="1300">
+                <a:solidFill>
+                  <a:srgbClr val="2D2D2D"/>
+                </a:solidFill>
+                <a:latin typeface="Consolas"/>
+              </a:rPr>
+              <a:t>mkdir -p ../meta-trainerdemo/recipes-trainergw/figlet/files</a:t>
+            </a:r>
+          </a:p>
+          <a:p>
+            <a:pPr>
+              <a:spcAft>
+                <a:spcPts val="0"/>
+              </a:spcAft>
+            </a:pPr>
+            <a:r>
+              <a:rPr sz="1300">
+                <a:solidFill>
+                  <a:srgbClr val="2D2D2D"/>
+                </a:solidFill>
+                <a:latin typeface="Consolas"/>
+              </a:rPr>
+              <a:t> </a:t>
+            </a:r>
+          </a:p>
+          <a:p>
+            <a:pPr>
+              <a:spcAft>
+                <a:spcPts val="0"/>
+              </a:spcAft>
+            </a:pPr>
+            <a:r>
+              <a:rPr sz="1300">
+                <a:solidFill>
+                  <a:srgbClr val="2D2D2D"/>
+                </a:solidFill>
+                <a:latin typeface="Consolas"/>
+              </a:rPr>
+              <a:t>cat &gt; ../meta-trainerdemo/recipes-trainergw/figlet/figlet_2.2.5.bb &lt;&lt;'EOF'</a:t>
+            </a:r>
+          </a:p>
+          <a:p>
+            <a:pPr>
+              <a:spcAft>
+                <a:spcPts val="0"/>
+              </a:spcAft>
+            </a:pPr>
+            <a:r>
+              <a:rPr sz="1300">
+                <a:solidFill>
+                  <a:srgbClr val="2D2D2D"/>
+                </a:solidFill>
+                <a:latin typeface="Consolas"/>
+              </a:rPr>
+              <a:t>SUMMARY = "Display large characters made up of ordinary screen characters"</a:t>
+            </a:r>
+          </a:p>
+          <a:p>
+            <a:pPr>
+              <a:spcAft>
+                <a:spcPts val="0"/>
+              </a:spcAft>
+            </a:pPr>
+            <a:r>
+              <a:rPr sz="1300">
+                <a:solidFill>
+                  <a:srgbClr val="2D2D2D"/>
+                </a:solidFill>
+                <a:latin typeface="Consolas"/>
+              </a:rPr>
+              <a:t>LICENSE = "BSD-3-Clause"</a:t>
+            </a:r>
+          </a:p>
+          <a:p>
+            <a:pPr>
+              <a:spcAft>
+                <a:spcPts val="0"/>
+              </a:spcAft>
+            </a:pPr>
+            <a:r>
+              <a:rPr sz="1300">
+                <a:solidFill>
+                  <a:srgbClr val="2D2D2D"/>
+                </a:solidFill>
+                <a:latin typeface="Consolas"/>
+              </a:rPr>
+              <a:t>LIC_FILES_CHKSUM = "file://LICENSE;md5=..."</a:t>
+            </a:r>
+          </a:p>
+          <a:p>
+            <a:pPr>
+              <a:spcAft>
+                <a:spcPts val="0"/>
+              </a:spcAft>
+            </a:pPr>
+            <a:r>
+              <a:rPr sz="1300">
+                <a:solidFill>
+                  <a:srgbClr val="2D2D2D"/>
+                </a:solidFill>
+                <a:latin typeface="Consolas"/>
+              </a:rPr>
+              <a:t> </a:t>
+            </a:r>
+          </a:p>
+          <a:p>
+            <a:pPr>
+              <a:spcAft>
+                <a:spcPts val="0"/>
+              </a:spcAft>
+            </a:pPr>
+            <a:r>
+              <a:rPr sz="1300">
+                <a:solidFill>
+                  <a:srgbClr val="2D2D2D"/>
+                </a:solidFill>
+                <a:latin typeface="Consolas"/>
+              </a:rPr>
+              <a:t>SRC_URI = "http://ftp.figlet.org/pub/figlet/program/unix/figlet-${PV}.tar.gz \</a:t>
+            </a:r>
+          </a:p>
+          <a:p>
+            <a:pPr>
+              <a:spcAft>
+                <a:spcPts val="0"/>
+              </a:spcAft>
+            </a:pPr>
+            <a:r>
+              <a:rPr sz="1300">
+                <a:solidFill>
+                  <a:srgbClr val="2D2D2D"/>
+                </a:solidFill>
+                <a:latin typeface="Consolas"/>
+              </a:rPr>
+              <a:t>           file://0001-banner-trainergw.patch"</a:t>
+            </a:r>
+          </a:p>
+          <a:p>
+            <a:pPr>
+              <a:spcAft>
+                <a:spcPts val="0"/>
+              </a:spcAft>
+            </a:pPr>
+            <a:r>
+              <a:rPr sz="1300">
+                <a:solidFill>
+                  <a:srgbClr val="2D2D2D"/>
+                </a:solidFill>
+                <a:latin typeface="Consolas"/>
+              </a:rPr>
+              <a:t>SRC_URI[sha256sum] = "bf88c40fd0f077dab2712f54f8d39ac952e4e9f2e1882f1195be9e5e4257417d"</a:t>
+            </a:r>
+          </a:p>
+          <a:p>
+            <a:pPr>
+              <a:spcAft>
+                <a:spcPts val="0"/>
+              </a:spcAft>
+            </a:pPr>
+            <a:r>
+              <a:rPr sz="1300">
+                <a:solidFill>
+                  <a:srgbClr val="2D2D2D"/>
+                </a:solidFill>
+                <a:latin typeface="Consolas"/>
+              </a:rPr>
+              <a:t> </a:t>
+            </a:r>
+          </a:p>
+          <a:p>
+            <a:pPr>
+              <a:spcAft>
+                <a:spcPts val="0"/>
+              </a:spcAft>
+            </a:pPr>
+            <a:r>
+              <a:rPr sz="1300">
+                <a:solidFill>
+                  <a:srgbClr val="2D2D2D"/>
+                </a:solidFill>
+                <a:latin typeface="Consolas"/>
+              </a:rPr>
+              <a:t>S = "${WORKDIR}/figlet-${PV}"</a:t>
+            </a:r>
+          </a:p>
+          <a:p>
+            <a:pPr>
+              <a:spcAft>
+                <a:spcPts val="0"/>
+              </a:spcAft>
+            </a:pPr>
+            <a:r>
+              <a:rPr sz="1300">
+                <a:solidFill>
+                  <a:srgbClr val="2D2D2D"/>
+                </a:solidFill>
+                <a:latin typeface="Consolas"/>
+              </a:rPr>
+              <a:t> </a:t>
+            </a:r>
+          </a:p>
+          <a:p>
+            <a:pPr>
+              <a:spcAft>
+                <a:spcPts val="0"/>
+              </a:spcAft>
+            </a:pPr>
+            <a:r>
+              <a:rPr sz="1300">
+                <a:solidFill>
+                  <a:srgbClr val="2D2D2D"/>
+                </a:solidFill>
+                <a:latin typeface="Consolas"/>
+              </a:rPr>
+              <a:t>do_install() {</a:t>
+            </a:r>
+          </a:p>
+          <a:p>
+            <a:pPr>
+              <a:spcAft>
+                <a:spcPts val="0"/>
+              </a:spcAft>
+            </a:pPr>
+            <a:r>
+              <a:rPr sz="1300">
+                <a:solidFill>
+                  <a:srgbClr val="2D2D2D"/>
+                </a:solidFill>
+                <a:latin typeface="Consolas"/>
+              </a:rPr>
+              <a:t>    oe_runmake DESTDIR=${D} prefix=${prefix} install</a:t>
+            </a:r>
+          </a:p>
+          <a:p>
+            <a:pPr>
+              <a:spcAft>
+                <a:spcPts val="0"/>
+              </a:spcAft>
+            </a:pPr>
+            <a:r>
+              <a:rPr sz="1300">
+                <a:solidFill>
+                  <a:srgbClr val="2D2D2D"/>
+                </a:solidFill>
+                <a:latin typeface="Consolas"/>
+              </a:rPr>
+              <a:t>}</a:t>
+            </a:r>
+          </a:p>
+          <a:p>
+            <a:pPr>
+              <a:spcAft>
+                <a:spcPts val="0"/>
+              </a:spcAft>
+            </a:pPr>
+            <a:r>
+              <a:rPr sz="1300">
+                <a:solidFill>
+                  <a:srgbClr val="2D2D2D"/>
+                </a:solidFill>
+                <a:latin typeface="Consolas"/>
+              </a:rPr>
+              <a:t>EOF</a:t>
+            </a:r>
+          </a:p>
+          <a:p>
+            <a:pPr>
+              <a:spcAft>
+                <a:spcPts val="0"/>
+              </a:spcAft>
+            </a:pPr>
+            <a:r>
+              <a:rPr sz="1300">
+                <a:solidFill>
+                  <a:srgbClr val="2D2D2D"/>
+                </a:solidFill>
+                <a:latin typeface="Consolas"/>
+              </a:rPr>
+              <a:t> </a:t>
+            </a:r>
+          </a:p>
+          <a:p>
+            <a:pPr>
+              <a:spcAft>
+                <a:spcPts val="0"/>
+              </a:spcAft>
+            </a:pPr>
+            <a:r>
+              <a:rPr sz="1300" i="1">
                 <a:solidFill>
                   <a:srgbClr val="808080"/>
                 </a:solidFill>
                 <a:latin typeface="Consolas"/>
               </a:rPr>
-              <a:t># Change 'oe_runmake' to 'oe_runmake INVALID_VAR=oops'</a:t>
+              <a:t># Add to image:</a:t>
             </a:r>
           </a:p>
           <a:p>
@@ -5415,285 +5967,13 @@
               </a:spcAft>
             </a:pPr>
             <a:r>
-              <a:rPr sz="1000">
+              <a:rPr sz="1300">
                 <a:solidFill>
                   <a:srgbClr val="2D2D2D"/>
                 </a:solidFill>
                 <a:latin typeface="Consolas"/>
               </a:rPr>
-              <a:t> </a:t>
-            </a:r>
-          </a:p>
-          <a:p>
-            <a:pPr>
-              <a:spcAft>
-                <a:spcPts val="0"/>
-              </a:spcAft>
-            </a:pPr>
-            <a:r>
-              <a:rPr sz="1000" i="1">
-                <a:solidFill>
-                  <a:srgbClr val="808080"/>
-                </a:solidFill>
-                <a:latin typeface="Consolas"/>
-              </a:rPr>
-              <a:t># Build, watch it fail</a:t>
-            </a:r>
-          </a:p>
-          <a:p>
-            <a:pPr>
-              <a:spcAft>
-                <a:spcPts val="0"/>
-              </a:spcAft>
-            </a:pPr>
-            <a:r>
-              <a:rPr sz="1000">
-                <a:solidFill>
-                  <a:srgbClr val="2D2D2D"/>
-                </a:solidFill>
-                <a:latin typeface="Consolas"/>
-              </a:rPr>
-              <a:t>bitbake figlet</a:t>
-            </a:r>
-          </a:p>
-          <a:p>
-            <a:pPr>
-              <a:spcAft>
-                <a:spcPts val="0"/>
-              </a:spcAft>
-            </a:pPr>
-            <a:r>
-              <a:rPr sz="1000">
-                <a:solidFill>
-                  <a:srgbClr val="2D2D2D"/>
-                </a:solidFill>
-                <a:latin typeface="Consolas"/>
-              </a:rPr>
-              <a:t> </a:t>
-            </a:r>
-          </a:p>
-          <a:p>
-            <a:pPr>
-              <a:spcAft>
-                <a:spcPts val="0"/>
-              </a:spcAft>
-            </a:pPr>
-            <a:r>
-              <a:rPr sz="1000" i="1">
-                <a:solidFill>
-                  <a:srgbClr val="808080"/>
-                </a:solidFill>
-                <a:latin typeface="Consolas"/>
-              </a:rPr>
-              <a:t># Read the error</a:t>
-            </a:r>
-          </a:p>
-          <a:p>
-            <a:pPr>
-              <a:spcAft>
-                <a:spcPts val="0"/>
-              </a:spcAft>
-            </a:pPr>
-            <a:r>
-              <a:rPr sz="1000" i="1">
-                <a:solidFill>
-                  <a:srgbClr val="808080"/>
-                </a:solidFill>
-                <a:latin typeface="Consolas"/>
-              </a:rPr>
-              <a:t># Find the log path from output, e.g.:</a:t>
-            </a:r>
-          </a:p>
-          <a:p>
-            <a:pPr>
-              <a:spcAft>
-                <a:spcPts val="0"/>
-              </a:spcAft>
-            </a:pPr>
-            <a:r>
-              <a:rPr sz="1000">
-                <a:solidFill>
-                  <a:srgbClr val="2D2D2D"/>
-                </a:solidFill>
-                <a:latin typeface="Consolas"/>
-              </a:rPr>
-              <a:t>less tmp/work/.../figlet/.../temp/log.do_install</a:t>
-            </a:r>
-          </a:p>
-          <a:p>
-            <a:pPr>
-              <a:spcAft>
-                <a:spcPts val="0"/>
-              </a:spcAft>
-            </a:pPr>
-            <a:r>
-              <a:rPr sz="1000">
-                <a:solidFill>
-                  <a:srgbClr val="2D2D2D"/>
-                </a:solidFill>
-                <a:latin typeface="Consolas"/>
-              </a:rPr>
-              <a:t> </a:t>
-            </a:r>
-          </a:p>
-          <a:p>
-            <a:pPr>
-              <a:spcAft>
-                <a:spcPts val="0"/>
-              </a:spcAft>
-            </a:pPr>
-            <a:r>
-              <a:rPr sz="1000" i="1">
-                <a:solidFill>
-                  <a:srgbClr val="808080"/>
-                </a:solidFill>
-                <a:latin typeface="Consolas"/>
-              </a:rPr>
-              <a:t># Look at the actual run script for that task</a:t>
-            </a:r>
-          </a:p>
-          <a:p>
-            <a:pPr>
-              <a:spcAft>
-                <a:spcPts val="0"/>
-              </a:spcAft>
-            </a:pPr>
-            <a:r>
-              <a:rPr sz="1000">
-                <a:solidFill>
-                  <a:srgbClr val="2D2D2D"/>
-                </a:solidFill>
-                <a:latin typeface="Consolas"/>
-              </a:rPr>
-              <a:t>cat tmp/work/.../figlet/.../temp/run.do_install</a:t>
-            </a:r>
-          </a:p>
-          <a:p>
-            <a:pPr>
-              <a:spcAft>
-                <a:spcPts val="0"/>
-              </a:spcAft>
-            </a:pPr>
-            <a:r>
-              <a:rPr sz="1000">
-                <a:solidFill>
-                  <a:srgbClr val="2D2D2D"/>
-                </a:solidFill>
-                <a:latin typeface="Consolas"/>
-              </a:rPr>
-              <a:t> </a:t>
-            </a:r>
-          </a:p>
-          <a:p>
-            <a:pPr>
-              <a:spcAft>
-                <a:spcPts val="0"/>
-              </a:spcAft>
-            </a:pPr>
-            <a:r>
-              <a:rPr sz="1000" i="1">
-                <a:solidFill>
-                  <a:srgbClr val="808080"/>
-                </a:solidFill>
-                <a:latin typeface="Consolas"/>
-              </a:rPr>
-              <a:t># Drop into a devshell to fix manually</a:t>
-            </a:r>
-          </a:p>
-          <a:p>
-            <a:pPr>
-              <a:spcAft>
-                <a:spcPts val="0"/>
-              </a:spcAft>
-            </a:pPr>
-            <a:r>
-              <a:rPr sz="1000">
-                <a:solidFill>
-                  <a:srgbClr val="2D2D2D"/>
-                </a:solidFill>
-                <a:latin typeface="Consolas"/>
-              </a:rPr>
-              <a:t>bitbake figlet -c devshell</a:t>
-            </a:r>
-          </a:p>
-          <a:p>
-            <a:pPr>
-              <a:spcAft>
-                <a:spcPts val="0"/>
-              </a:spcAft>
-            </a:pPr>
-            <a:r>
-              <a:rPr sz="1000" i="1">
-                <a:solidFill>
-                  <a:srgbClr val="808080"/>
-                </a:solidFill>
-                <a:latin typeface="Consolas"/>
-              </a:rPr>
-              <a:t># inside: try `oe_runmake DESTDIR=$D prefix=$prefix install` and see it work</a:t>
-            </a:r>
-          </a:p>
-          <a:p>
-            <a:pPr>
-              <a:spcAft>
-                <a:spcPts val="0"/>
-              </a:spcAft>
-            </a:pPr>
-            <a:r>
-              <a:rPr sz="1000">
-                <a:solidFill>
-                  <a:srgbClr val="2D2D2D"/>
-                </a:solidFill>
-                <a:latin typeface="Consolas"/>
-              </a:rPr>
-              <a:t>exit</a:t>
-            </a:r>
-          </a:p>
-          <a:p>
-            <a:pPr>
-              <a:spcAft>
-                <a:spcPts val="0"/>
-              </a:spcAft>
-            </a:pPr>
-            <a:r>
-              <a:rPr sz="1000">
-                <a:solidFill>
-                  <a:srgbClr val="2D2D2D"/>
-                </a:solidFill>
-                <a:latin typeface="Consolas"/>
-              </a:rPr>
-              <a:t> </a:t>
-            </a:r>
-          </a:p>
-          <a:p>
-            <a:pPr>
-              <a:spcAft>
-                <a:spcPts val="0"/>
-              </a:spcAft>
-            </a:pPr>
-            <a:r>
-              <a:rPr sz="1000" i="1">
-                <a:solidFill>
-                  <a:srgbClr val="808080"/>
-                </a:solidFill>
-                <a:latin typeface="Consolas"/>
-              </a:rPr>
-              <a:t># Restore the recipe, retry</a:t>
-            </a:r>
-          </a:p>
-          <a:p>
-            <a:pPr>
-              <a:spcAft>
-                <a:spcPts val="0"/>
-              </a:spcAft>
-            </a:pPr>
-            <a:r>
-              <a:rPr sz="1000">
-                <a:solidFill>
-                  <a:srgbClr val="2D2D2D"/>
-                </a:solidFill>
-                <a:latin typeface="Consolas"/>
-              </a:rPr>
-              <a:t>bitbake figlet</a:t>
+              <a:t>echo 'IMAGE_INSTALL:append = " figlet"' &gt;&gt; conf/local.conf</a:t>
             </a:r>
           </a:p>
         </p:txBody>
@@ -5706,8 +5986,8 @@
 </p:sld>
 </file>
 
-<file path=ppt/slides/slide11.xml><?xml version="1.0" encoding="utf-8"?>
-<p:sld xmlns:a="http://schemas.openxmlformats.org/drawingml/2006/main" xmlns:p="http://schemas.openxmlformats.org/presentationml/2006/main" xmlns:r="http://schemas.openxmlformats.org/officeDocument/2006/relationships">
+<file path=ppt/slides/slide4.xml><?xml version="1.0" encoding="utf-8"?>
+<p:sld xmlns:a="http://schemas.openxmlformats.org/drawingml/2006/main" xmlns:r="http://schemas.openxmlformats.org/officeDocument/2006/relationships" xmlns:p="http://schemas.openxmlformats.org/presentationml/2006/main">
   <p:cSld>
     <p:spTree>
       <p:nvGrpSpPr>
@@ -5715,7 +5995,14 @@
         <p:cNvGrpSpPr/>
         <p:nvPr/>
       </p:nvGrpSpPr>
-      <p:grpSpPr/>
+      <p:grpSpPr>
+        <a:xfrm>
+          <a:off x="0" y="0"/>
+          <a:ext cx="0" cy="0"/>
+          <a:chOff x="0" y="0"/>
+          <a:chExt cx="0" cy="0"/>
+        </a:xfrm>
+      </p:grpSpPr>
       <p:sp>
         <p:nvSpPr>
           <p:cNvPr id="2" name="Title 1"/>
@@ -5732,13 +6019,28 @@
           <a:lstStyle/>
           <a:p>
             <a:r>
-              <a:rPr sz="3200" b="1">
-                <a:solidFill>
-                  <a:srgbClr val="CC0066"/>
-                </a:solidFill>
+              <a:rPr sz="3200" b="1" dirty="0">
                 <a:latin typeface="Calibri"/>
               </a:rPr>
-              <a:t>Step 3 — Observe sstate Behavior</a:t>
+              <a:t>Step 2</a:t>
+            </a:r>
+            <a:r>
+              <a:rPr lang="en-IN" sz="3200" b="1" dirty="0">
+                <a:latin typeface="Calibri"/>
+              </a:rPr>
+              <a:t>: Tri</a:t>
+            </a:r>
+            <a:r>
+              <a:rPr sz="3200" b="1" dirty="0" err="1">
+                <a:latin typeface="Calibri"/>
+              </a:rPr>
+              <a:t>gger</a:t>
+            </a:r>
+            <a:r>
+              <a:rPr sz="3200" b="1" dirty="0">
+                <a:latin typeface="Calibri"/>
+              </a:rPr>
+              <a:t> and Diagnose a Failure</a:t>
             </a:r>
           </a:p>
         </p:txBody>
@@ -5760,7 +6062,7 @@
           <a:noFill/>
         </p:spPr>
         <p:txBody>
-          <a:bodyPr wrap="square" anchor="t" lIns="45720" rIns="45720">
+          <a:bodyPr wrap="square" lIns="45720" rIns="45720" anchor="t">
             <a:spAutoFit/>
           </a:bodyPr>
           <a:lstStyle/>
@@ -5773,7 +6075,7 @@
                 </a:solidFill>
                 <a:latin typeface="Calibri"/>
               </a:rPr>
-              <a:t>Watch the cache do its job.</a:t>
+              <a:t>Break the recipe deliberately. Find it from the log.</a:t>
             </a:r>
           </a:p>
         </p:txBody>
@@ -5821,6 +6123,7 @@
           <a:lstStyle/>
           <a:p>
             <a:pPr algn="ctr"/>
+            <a:endParaRPr/>
           </a:p>
         </p:txBody>
       </p:sp>
@@ -5865,6 +6168,7 @@
           <a:lstStyle/>
           <a:p>
             <a:pPr algn="ctr"/>
+            <a:endParaRPr/>
           </a:p>
         </p:txBody>
       </p:sp>
@@ -5876,8 +6180,8 @@
         </p:nvSpPr>
         <p:spPr>
           <a:xfrm>
-            <a:off x="1005840" y="1874519"/>
-            <a:ext cx="10241280" cy="4389120"/>
+            <a:off x="1271311" y="1783080"/>
+            <a:ext cx="10241280" cy="4616648"/>
           </a:xfrm>
           <a:prstGeom prst="rect">
             <a:avLst/>
@@ -5896,13 +6200,13 @@
               </a:spcAft>
             </a:pPr>
             <a:r>
-              <a:rPr sz="1100" i="1">
+              <a:rPr sz="1400" i="1">
                 <a:solidFill>
                   <a:srgbClr val="808080"/>
                 </a:solidFill>
                 <a:latin typeface="Consolas"/>
               </a:rPr>
-              <a:t># First build of figlet</a:t>
+              <a:t># Edit the recipe to break it on purpose</a:t>
             </a:r>
           </a:p>
           <a:p>
@@ -5912,13 +6216,13 @@
               </a:spcAft>
             </a:pPr>
             <a:r>
-              <a:rPr sz="1100">
+              <a:rPr sz="1400">
                 <a:solidFill>
                   <a:srgbClr val="2D2D2D"/>
                 </a:solidFill>
                 <a:latin typeface="Consolas"/>
               </a:rPr>
-              <a:t>time bitbake figlet -c cleansstate &amp;&amp; time bitbake figlet</a:t>
+              <a:t>vi ../meta-trainerdemo/recipes-trainergw/figlet/figlet_2.2.5.bb</a:t>
             </a:r>
           </a:p>
           <a:p>
@@ -5928,13 +6232,13 @@
               </a:spcAft>
             </a:pPr>
             <a:r>
-              <a:rPr sz="1100" i="1">
+              <a:rPr sz="1400" i="1">
                 <a:solidFill>
                   <a:srgbClr val="808080"/>
                 </a:solidFill>
                 <a:latin typeface="Consolas"/>
               </a:rPr>
-              <a:t># Note the wall time</a:t>
+              <a:t># Change 'oe_runmake' to 'oe_runmake INVALID_VAR=oops'</a:t>
             </a:r>
           </a:p>
           <a:p>
@@ -5944,7 +6248,7 @@
               </a:spcAft>
             </a:pPr>
             <a:r>
-              <a:rPr sz="1100">
+              <a:rPr sz="1400">
                 <a:solidFill>
                   <a:srgbClr val="2D2D2D"/>
                 </a:solidFill>
@@ -5960,13 +6264,13 @@
               </a:spcAft>
             </a:pPr>
             <a:r>
-              <a:rPr sz="1100" i="1">
+              <a:rPr sz="1400" i="1">
                 <a:solidFill>
                   <a:srgbClr val="808080"/>
                 </a:solidFill>
                 <a:latin typeface="Consolas"/>
               </a:rPr>
-              <a:t># Second build, no changes — should be near-instant</a:t>
+              <a:t># Build, watch it fail</a:t>
             </a:r>
           </a:p>
           <a:p>
@@ -5976,13 +6280,13 @@
               </a:spcAft>
             </a:pPr>
             <a:r>
-              <a:rPr sz="1100">
+              <a:rPr sz="1400">
                 <a:solidFill>
                   <a:srgbClr val="2D2D2D"/>
                 </a:solidFill>
                 <a:latin typeface="Consolas"/>
               </a:rPr>
-              <a:t>time bitbake figlet</a:t>
+              <a:t>bitbake figlet</a:t>
             </a:r>
           </a:p>
           <a:p>
@@ -5992,7 +6296,7 @@
               </a:spcAft>
             </a:pPr>
             <a:r>
-              <a:rPr sz="1100">
+              <a:rPr sz="1400">
                 <a:solidFill>
                   <a:srgbClr val="2D2D2D"/>
                 </a:solidFill>
@@ -6008,13 +6312,13 @@
               </a:spcAft>
             </a:pPr>
             <a:r>
-              <a:rPr sz="1100" i="1">
+              <a:rPr sz="1400" i="1">
                 <a:solidFill>
                   <a:srgbClr val="808080"/>
                 </a:solidFill>
                 <a:latin typeface="Consolas"/>
               </a:rPr>
-              <a:t># Touch the recipe — invalidate sstate for figlet</a:t>
+              <a:t># Read the error</a:t>
             </a:r>
           </a:p>
           <a:p>
@@ -6024,13 +6328,29 @@
               </a:spcAft>
             </a:pPr>
             <a:r>
-              <a:rPr sz="1100">
+              <a:rPr sz="1400" i="1">
+                <a:solidFill>
+                  <a:srgbClr val="808080"/>
+                </a:solidFill>
+                <a:latin typeface="Consolas"/>
+              </a:rPr>
+              <a:t># Find the log path from output, e.g.:</a:t>
+            </a:r>
+          </a:p>
+          <a:p>
+            <a:pPr>
+              <a:spcAft>
+                <a:spcPts val="0"/>
+              </a:spcAft>
+            </a:pPr>
+            <a:r>
+              <a:rPr sz="1400">
                 <a:solidFill>
                   <a:srgbClr val="2D2D2D"/>
                 </a:solidFill>
                 <a:latin typeface="Consolas"/>
               </a:rPr>
-              <a:t>touch ../meta-trainerdemo/recipes-trainergw/figlet/figlet_2.2.5.bb</a:t>
+              <a:t>less tmp/work/.../figlet/.../temp/log.do_install</a:t>
             </a:r>
           </a:p>
           <a:p>
@@ -6040,13 +6360,13 @@
               </a:spcAft>
             </a:pPr>
             <a:r>
-              <a:rPr sz="1100">
+              <a:rPr sz="1400">
                 <a:solidFill>
                   <a:srgbClr val="2D2D2D"/>
                 </a:solidFill>
                 <a:latin typeface="Consolas"/>
               </a:rPr>
-              <a:t>time bitbake figlet</a:t>
+              <a:t> </a:t>
             </a:r>
           </a:p>
           <a:p>
@@ -6056,13 +6376,13 @@
               </a:spcAft>
             </a:pPr>
             <a:r>
-              <a:rPr sz="1100" i="1">
+              <a:rPr sz="1400" i="1">
                 <a:solidFill>
                   <a:srgbClr val="808080"/>
                 </a:solidFill>
                 <a:latin typeface="Consolas"/>
               </a:rPr>
-              <a:t># Should rebuild figlet itself but not its dependencies</a:t>
+              <a:t># Look at the actual run script for that task</a:t>
             </a:r>
           </a:p>
           <a:p>
@@ -6072,12 +6392,28 @@
               </a:spcAft>
             </a:pPr>
             <a:r>
-              <a:rPr sz="1100">
+              <a:rPr sz="1400">
                 <a:solidFill>
                   <a:srgbClr val="2D2D2D"/>
                 </a:solidFill>
                 <a:latin typeface="Consolas"/>
               </a:rPr>
+              <a:t>cat tmp/work/.../figlet/.../temp/run.do_install</a:t>
+            </a:r>
+          </a:p>
+          <a:p>
+            <a:pPr>
+              <a:spcAft>
+                <a:spcPts val="0"/>
+              </a:spcAft>
+            </a:pPr>
+            <a:r>
+              <a:rPr sz="1400">
+                <a:solidFill>
+                  <a:srgbClr val="2D2D2D"/>
+                </a:solidFill>
+                <a:latin typeface="Consolas"/>
+              </a:rPr>
               <a:t> </a:t>
             </a:r>
           </a:p>
@@ -6088,13 +6424,13 @@
               </a:spcAft>
             </a:pPr>
             <a:r>
-              <a:rPr sz="1100" i="1">
+              <a:rPr sz="1400" i="1">
                 <a:solidFill>
                   <a:srgbClr val="808080"/>
                 </a:solidFill>
                 <a:latin typeface="Consolas"/>
               </a:rPr>
-              <a:t># Inspect what signatures changed</a:t>
+              <a:t># Drop into a devshell to fix manually</a:t>
             </a:r>
           </a:p>
           <a:p>
@@ -6104,13 +6440,13 @@
               </a:spcAft>
             </a:pPr>
             <a:r>
-              <a:rPr sz="1100">
+              <a:rPr sz="1400">
                 <a:solidFill>
                   <a:srgbClr val="2D2D2D"/>
                 </a:solidFill>
                 <a:latin typeface="Consolas"/>
               </a:rPr>
-              <a:t>bitbake -S printdiff figlet</a:t>
+              <a:t>bitbake figlet -c devshell</a:t>
             </a:r>
           </a:p>
           <a:p>
@@ -6120,12 +6456,44 @@
               </a:spcAft>
             </a:pPr>
             <a:r>
-              <a:rPr sz="1100">
+              <a:rPr sz="1400" i="1">
+                <a:solidFill>
+                  <a:srgbClr val="808080"/>
+                </a:solidFill>
+                <a:latin typeface="Consolas"/>
+              </a:rPr>
+              <a:t># inside: try `oe_runmake DESTDIR=$D prefix=$prefix install` and see it work</a:t>
+            </a:r>
+          </a:p>
+          <a:p>
+            <a:pPr>
+              <a:spcAft>
+                <a:spcPts val="0"/>
+              </a:spcAft>
+            </a:pPr>
+            <a:r>
+              <a:rPr sz="1400">
                 <a:solidFill>
                   <a:srgbClr val="2D2D2D"/>
                 </a:solidFill>
                 <a:latin typeface="Consolas"/>
               </a:rPr>
+              <a:t>exit</a:t>
+            </a:r>
+          </a:p>
+          <a:p>
+            <a:pPr>
+              <a:spcAft>
+                <a:spcPts val="0"/>
+              </a:spcAft>
+            </a:pPr>
+            <a:r>
+              <a:rPr sz="1400">
+                <a:solidFill>
+                  <a:srgbClr val="2D2D2D"/>
+                </a:solidFill>
+                <a:latin typeface="Consolas"/>
+              </a:rPr>
               <a:t> </a:t>
             </a:r>
           </a:p>
@@ -6136,13 +6504,13 @@
               </a:spcAft>
             </a:pPr>
             <a:r>
-              <a:rPr sz="1100" i="1">
+              <a:rPr sz="1400" i="1">
                 <a:solidFill>
                   <a:srgbClr val="808080"/>
                 </a:solidFill>
                 <a:latin typeface="Consolas"/>
               </a:rPr>
-              <a:t># Look at the sstate dir</a:t>
+              <a:t># Restore the recipe, retry</a:t>
             </a:r>
           </a:p>
           <a:p>
@@ -6152,13 +6520,13 @@
               </a:spcAft>
             </a:pPr>
             <a:r>
-              <a:rPr sz="1100">
+              <a:rPr sz="1400">
                 <a:solidFill>
                   <a:srgbClr val="2D2D2D"/>
                 </a:solidFill>
                 <a:latin typeface="Consolas"/>
               </a:rPr>
-              <a:t>ls -lh ~/yocto/sstate-cache/ | head</a:t>
+              <a:t>bitbake figlet</a:t>
             </a:r>
           </a:p>
         </p:txBody>
@@ -6171,8 +6539,8 @@
 </p:sld>
 </file>
 
-<file path=ppt/slides/slide12.xml><?xml version="1.0" encoding="utf-8"?>
-<p:sld xmlns:a="http://schemas.openxmlformats.org/drawingml/2006/main" xmlns:p="http://schemas.openxmlformats.org/presentationml/2006/main" xmlns:r="http://schemas.openxmlformats.org/officeDocument/2006/relationships">
+<file path=ppt/slides/slide5.xml><?xml version="1.0" encoding="utf-8"?>
+<p:sld xmlns:a="http://schemas.openxmlformats.org/drawingml/2006/main" xmlns:r="http://schemas.openxmlformats.org/officeDocument/2006/relationships" xmlns:p="http://schemas.openxmlformats.org/presentationml/2006/main">
   <p:cSld>
     <p:spTree>
       <p:nvGrpSpPr>
@@ -6180,7 +6548,14 @@
         <p:cNvGrpSpPr/>
         <p:nvPr/>
       </p:nvGrpSpPr>
-      <p:grpSpPr/>
+      <p:grpSpPr>
+        <a:xfrm>
+          <a:off x="0" y="0"/>
+          <a:ext cx="0" cy="0"/>
+          <a:chOff x="0" y="0"/>
+          <a:chExt cx="0" cy="0"/>
+        </a:xfrm>
+      </p:grpSpPr>
       <p:sp>
         <p:nvSpPr>
           <p:cNvPr id="2" name="Title 1"/>
@@ -6197,13 +6572,34 @@
           <a:lstStyle/>
           <a:p>
             <a:r>
-              <a:rPr sz="3200" b="1">
-                <a:solidFill>
-                  <a:srgbClr val="CC0066"/>
-                </a:solidFill>
+              <a:rPr sz="3200" b="1" dirty="0">
                 <a:latin typeface="Calibri"/>
               </a:rPr>
-              <a:t>Step 4 — Switch Package Class</a:t>
+              <a:t>Step 3</a:t>
+            </a:r>
+            <a:r>
+              <a:rPr lang="en-IN" sz="3200" b="1" dirty="0">
+                <a:latin typeface="Calibri"/>
+              </a:rPr>
+              <a:t>: Observe</a:t>
+            </a:r>
+            <a:r>
+              <a:rPr sz="3200" b="1" dirty="0">
+                <a:latin typeface="Calibri"/>
+              </a:rPr>
+              <a:t> </a:t>
+            </a:r>
+            <a:r>
+              <a:rPr sz="3200" b="1" dirty="0" err="1">
+                <a:latin typeface="Calibri"/>
+              </a:rPr>
+              <a:t>sstate</a:t>
+            </a:r>
+            <a:r>
+              <a:rPr sz="3200" b="1" dirty="0">
+                <a:latin typeface="Calibri"/>
+              </a:rPr>
+              <a:t> Behavior</a:t>
             </a:r>
           </a:p>
         </p:txBody>
@@ -6225,7 +6621,7 @@
           <a:noFill/>
         </p:spPr>
         <p:txBody>
-          <a:bodyPr wrap="square" anchor="t" lIns="45720" rIns="45720">
+          <a:bodyPr wrap="square" lIns="45720" rIns="45720" anchor="t">
             <a:spAutoFit/>
           </a:bodyPr>
           <a:lstStyle/>
@@ -6238,7 +6634,7 @@
                 </a:solidFill>
                 <a:latin typeface="Calibri"/>
               </a:rPr>
-              <a:t>Rebuild the image with a different package format. Observe.</a:t>
+              <a:t>Watch the cache do its job.</a:t>
             </a:r>
           </a:p>
         </p:txBody>
@@ -6286,6 +6682,7 @@
           <a:lstStyle/>
           <a:p>
             <a:pPr algn="ctr"/>
+            <a:endParaRPr/>
           </a:p>
         </p:txBody>
       </p:sp>
@@ -6330,6 +6727,7 @@
           <a:lstStyle/>
           <a:p>
             <a:pPr algn="ctr"/>
+            <a:endParaRPr/>
           </a:p>
         </p:txBody>
       </p:sp>
@@ -6342,7 +6740,7 @@
         <p:spPr>
           <a:xfrm>
             <a:off x="1005840" y="1874519"/>
-            <a:ext cx="10241280" cy="4389120"/>
+            <a:ext cx="10241280" cy="4278094"/>
           </a:xfrm>
           <a:prstGeom prst="rect">
             <a:avLst/>
@@ -6361,13 +6759,13 @@
               </a:spcAft>
             </a:pPr>
             <a:r>
-              <a:rPr sz="1000" i="1">
+              <a:rPr sz="1600" i="1">
                 <a:solidFill>
                   <a:srgbClr val="808080"/>
                 </a:solidFill>
                 <a:latin typeface="Consolas"/>
               </a:rPr>
-              <a:t># Backup local.conf first</a:t>
+              <a:t># First build of figlet</a:t>
             </a:r>
           </a:p>
           <a:p>
@@ -6377,13 +6775,13 @@
               </a:spcAft>
             </a:pPr>
             <a:r>
-              <a:rPr sz="1000">
+              <a:rPr sz="1600">
                 <a:solidFill>
                   <a:srgbClr val="2D2D2D"/>
                 </a:solidFill>
                 <a:latin typeface="Consolas"/>
               </a:rPr>
-              <a:t>cp conf/local.conf conf/local.conf.bak</a:t>
+              <a:t>time bitbake figlet -c cleansstate &amp;&amp; time bitbake figlet</a:t>
             </a:r>
           </a:p>
           <a:p>
@@ -6393,7 +6791,23 @@
               </a:spcAft>
             </a:pPr>
             <a:r>
-              <a:rPr sz="1000">
+              <a:rPr sz="1600" i="1">
+                <a:solidFill>
+                  <a:srgbClr val="808080"/>
+                </a:solidFill>
+                <a:latin typeface="Consolas"/>
+              </a:rPr>
+              <a:t># Note the wall time</a:t>
+            </a:r>
+          </a:p>
+          <a:p>
+            <a:pPr>
+              <a:spcAft>
+                <a:spcPts val="0"/>
+              </a:spcAft>
+            </a:pPr>
+            <a:r>
+              <a:rPr sz="1600">
                 <a:solidFill>
                   <a:srgbClr val="2D2D2D"/>
                 </a:solidFill>
@@ -6409,13 +6823,13 @@
               </a:spcAft>
             </a:pPr>
             <a:r>
-              <a:rPr sz="1000" i="1">
+              <a:rPr sz="1600" i="1">
                 <a:solidFill>
                   <a:srgbClr val="808080"/>
                 </a:solidFill>
                 <a:latin typeface="Consolas"/>
               </a:rPr>
-              <a:t># Change to ipk packaging</a:t>
+              <a:t># Second build, no changes — should be near-instant</a:t>
             </a:r>
           </a:p>
           <a:p>
@@ -6425,13 +6839,13 @@
               </a:spcAft>
             </a:pPr>
             <a:r>
-              <a:rPr sz="1000">
+              <a:rPr sz="1600">
                 <a:solidFill>
                   <a:srgbClr val="2D2D2D"/>
                 </a:solidFill>
                 <a:latin typeface="Consolas"/>
               </a:rPr>
-              <a:t>sed -i 's/PACKAGE_CLASSES.*/PACKAGE_CLASSES = "package_ipk"/' conf/local.conf</a:t>
+              <a:t>time bitbake figlet</a:t>
             </a:r>
           </a:p>
           <a:p>
@@ -6441,7 +6855,7 @@
               </a:spcAft>
             </a:pPr>
             <a:r>
-              <a:rPr sz="1000">
+              <a:rPr sz="1600">
                 <a:solidFill>
                   <a:srgbClr val="2D2D2D"/>
                 </a:solidFill>
@@ -6457,13 +6871,13 @@
               </a:spcAft>
             </a:pPr>
             <a:r>
-              <a:rPr sz="1000" i="1">
+              <a:rPr sz="1600" i="1">
                 <a:solidFill>
                   <a:srgbClr val="808080"/>
                 </a:solidFill>
                 <a:latin typeface="Consolas"/>
               </a:rPr>
-              <a:t># Or add the line if not present</a:t>
+              <a:t># Touch the recipe — invalidate sstate for figlet</a:t>
             </a:r>
           </a:p>
           <a:p>
@@ -6473,13 +6887,13 @@
               </a:spcAft>
             </a:pPr>
             <a:r>
-              <a:rPr sz="1000">
+              <a:rPr sz="1600">
                 <a:solidFill>
                   <a:srgbClr val="2D2D2D"/>
                 </a:solidFill>
                 <a:latin typeface="Consolas"/>
               </a:rPr>
-              <a:t>grep -q PACKAGE_CLASSES conf/local.conf || echo 'PACKAGE_CLASSES = "package_ipk"' &gt;&gt; conf/local.conf</a:t>
+              <a:t>touch ../meta-trainerdemo/recipes-trainergw/figlet/figlet_2.2.5.bb</a:t>
             </a:r>
           </a:p>
           <a:p>
@@ -6489,12 +6903,44 @@
               </a:spcAft>
             </a:pPr>
             <a:r>
-              <a:rPr sz="1000">
+              <a:rPr sz="1600">
                 <a:solidFill>
                   <a:srgbClr val="2D2D2D"/>
                 </a:solidFill>
                 <a:latin typeface="Consolas"/>
               </a:rPr>
+              <a:t>time bitbake figlet</a:t>
+            </a:r>
+          </a:p>
+          <a:p>
+            <a:pPr>
+              <a:spcAft>
+                <a:spcPts val="0"/>
+              </a:spcAft>
+            </a:pPr>
+            <a:r>
+              <a:rPr sz="1600" i="1">
+                <a:solidFill>
+                  <a:srgbClr val="808080"/>
+                </a:solidFill>
+                <a:latin typeface="Consolas"/>
+              </a:rPr>
+              <a:t># Should rebuild figlet itself but not its dependencies</a:t>
+            </a:r>
+          </a:p>
+          <a:p>
+            <a:pPr>
+              <a:spcAft>
+                <a:spcPts val="0"/>
+              </a:spcAft>
+            </a:pPr>
+            <a:r>
+              <a:rPr sz="1600">
+                <a:solidFill>
+                  <a:srgbClr val="2D2D2D"/>
+                </a:solidFill>
+                <a:latin typeface="Consolas"/>
+              </a:rPr>
               <a:t> </a:t>
             </a:r>
           </a:p>
@@ -6505,13 +6951,13 @@
               </a:spcAft>
             </a:pPr>
             <a:r>
-              <a:rPr sz="1000" i="1">
+              <a:rPr sz="1600" i="1">
                 <a:solidFill>
                   <a:srgbClr val="808080"/>
                 </a:solidFill>
                 <a:latin typeface="Consolas"/>
               </a:rPr>
-              <a:t># Rebuild — note sstate hits/misses</a:t>
+              <a:t># Inspect what signatures changed</a:t>
             </a:r>
           </a:p>
           <a:p>
@@ -6521,13 +6967,13 @@
               </a:spcAft>
             </a:pPr>
             <a:r>
-              <a:rPr sz="1000">
+              <a:rPr sz="1600">
                 <a:solidFill>
                   <a:srgbClr val="2D2D2D"/>
                 </a:solidFill>
                 <a:latin typeface="Consolas"/>
               </a:rPr>
-              <a:t>bitbake core-image-base</a:t>
+              <a:t>bitbake -S printdiff figlet</a:t>
             </a:r>
           </a:p>
           <a:p>
@@ -6537,7 +6983,7 @@
               </a:spcAft>
             </a:pPr>
             <a:r>
-              <a:rPr sz="1000">
+              <a:rPr sz="1600">
                 <a:solidFill>
                   <a:srgbClr val="2D2D2D"/>
                 </a:solidFill>
@@ -6553,13 +6999,13 @@
               </a:spcAft>
             </a:pPr>
             <a:r>
-              <a:rPr sz="1000" i="1">
+              <a:rPr sz="1600" i="1">
                 <a:solidFill>
                   <a:srgbClr val="808080"/>
                 </a:solidFill>
                 <a:latin typeface="Consolas"/>
               </a:rPr>
-              <a:t># Compare deploy directories</a:t>
+              <a:t># Look at the sstate dir</a:t>
             </a:r>
           </a:p>
           <a:p>
@@ -6569,93 +7015,13 @@
               </a:spcAft>
             </a:pPr>
             <a:r>
-              <a:rPr sz="1000">
+              <a:rPr sz="1600">
                 <a:solidFill>
                   <a:srgbClr val="2D2D2D"/>
                 </a:solidFill>
                 <a:latin typeface="Consolas"/>
               </a:rPr>
-              <a:t>ls tmp/deploy/ipk/  2&gt;/dev/null | head</a:t>
-            </a:r>
-          </a:p>
-          <a:p>
-            <a:pPr>
-              <a:spcAft>
-                <a:spcPts val="0"/>
-              </a:spcAft>
-            </a:pPr>
-            <a:r>
-              <a:rPr sz="1000">
-                <a:solidFill>
-                  <a:srgbClr val="2D2D2D"/>
-                </a:solidFill>
-                <a:latin typeface="Consolas"/>
-              </a:rPr>
-              <a:t>ls tmp/deploy/rpm/  2&gt;/dev/null | head</a:t>
-            </a:r>
-          </a:p>
-          <a:p>
-            <a:pPr>
-              <a:spcAft>
-                <a:spcPts val="0"/>
-              </a:spcAft>
-            </a:pPr>
-            <a:r>
-              <a:rPr sz="1000">
-                <a:solidFill>
-                  <a:srgbClr val="2D2D2D"/>
-                </a:solidFill>
-                <a:latin typeface="Consolas"/>
-              </a:rPr>
-              <a:t>ls tmp/deploy/deb/  2&gt;/dev/null | head</a:t>
-            </a:r>
-          </a:p>
-          <a:p>
-            <a:pPr>
-              <a:spcAft>
-                <a:spcPts val="0"/>
-              </a:spcAft>
-            </a:pPr>
-            <a:r>
-              <a:rPr sz="1000">
-                <a:solidFill>
-                  <a:srgbClr val="2D2D2D"/>
-                </a:solidFill>
-                <a:latin typeface="Consolas"/>
-              </a:rPr>
-              <a:t> </a:t>
-            </a:r>
-          </a:p>
-          <a:p>
-            <a:pPr>
-              <a:spcAft>
-                <a:spcPts val="0"/>
-              </a:spcAft>
-            </a:pPr>
-            <a:r>
-              <a:rPr sz="1000" i="1">
-                <a:solidFill>
-                  <a:srgbClr val="808080"/>
-                </a:solidFill>
-                <a:latin typeface="Consolas"/>
-              </a:rPr>
-              <a:t># Compare image sizes between the two builds</a:t>
-            </a:r>
-          </a:p>
-          <a:p>
-            <a:pPr>
-              <a:spcAft>
-                <a:spcPts val="0"/>
-              </a:spcAft>
-            </a:pPr>
-            <a:r>
-              <a:rPr sz="1000">
-                <a:solidFill>
-                  <a:srgbClr val="2D2D2D"/>
-                </a:solidFill>
-                <a:latin typeface="Consolas"/>
-              </a:rPr>
-              <a:t>du -sh tmp/deploy/images/qemux86-64/core-image-base*ext4* 2&gt;/dev/null</a:t>
+              <a:t>ls -lh ~/yocto/sstate-cache/ | head</a:t>
             </a:r>
           </a:p>
         </p:txBody>
@@ -6668,8 +7034,8 @@
 </p:sld>
 </file>
 
-<file path=ppt/slides/slide13.xml><?xml version="1.0" encoding="utf-8"?>
-<p:sld xmlns:a="http://schemas.openxmlformats.org/drawingml/2006/main" xmlns:p="http://schemas.openxmlformats.org/presentationml/2006/main" xmlns:r="http://schemas.openxmlformats.org/officeDocument/2006/relationships">
+<file path=ppt/slides/slide6.xml><?xml version="1.0" encoding="utf-8"?>
+<p:sld xmlns:a="http://schemas.openxmlformats.org/drawingml/2006/main" xmlns:r="http://schemas.openxmlformats.org/officeDocument/2006/relationships" xmlns:p="http://schemas.openxmlformats.org/presentationml/2006/main">
   <p:cSld>
     <p:spTree>
       <p:nvGrpSpPr>
@@ -6677,7 +7043,14 @@
         <p:cNvGrpSpPr/>
         <p:nvPr/>
       </p:nvGrpSpPr>
-      <p:grpSpPr/>
+      <p:grpSpPr>
+        <a:xfrm>
+          <a:off x="0" y="0"/>
+          <a:ext cx="0" cy="0"/>
+          <a:chOff x="0" y="0"/>
+          <a:chExt cx="0" cy="0"/>
+        </a:xfrm>
+      </p:grpSpPr>
       <p:sp>
         <p:nvSpPr>
           <p:cNvPr id="2" name="Title 1"/>
@@ -6694,13 +7067,22 @@
           <a:lstStyle/>
           <a:p>
             <a:r>
-              <a:rPr sz="3200" b="1">
-                <a:solidFill>
-                  <a:srgbClr val="663399"/>
-                </a:solidFill>
+              <a:rPr sz="3200" b="1" dirty="0">
                 <a:latin typeface="Calibri"/>
               </a:rPr>
-              <a:t>Session Summary</a:t>
+              <a:t>Step 4</a:t>
+            </a:r>
+            <a:r>
+              <a:rPr lang="en-IN" sz="3200" b="1" dirty="0">
+                <a:latin typeface="Calibri"/>
+              </a:rPr>
+              <a:t>: </a:t>
+            </a:r>
+            <a:r>
+              <a:rPr sz="3200" b="1" dirty="0">
+                <a:latin typeface="Calibri"/>
+              </a:rPr>
+              <a:t>Switch Package Class</a:t>
             </a:r>
           </a:p>
         </p:txBody>
@@ -6722,7 +7104,7 @@
           <a:noFill/>
         </p:spPr>
         <p:txBody>
-          <a:bodyPr wrap="square" anchor="t" lIns="45720" rIns="45720">
+          <a:bodyPr wrap="square" lIns="45720" rIns="45720" anchor="t">
             <a:spAutoFit/>
           </a:bodyPr>
           <a:lstStyle/>
@@ -6735,995 +7117,7 @@
                 </a:solidFill>
                 <a:latin typeface="Calibri"/>
               </a:rPr>
-              <a:t>5 things to remember from this session.</a:t>
-            </a:r>
-          </a:p>
-        </p:txBody>
-      </p:sp>
-      <p:sp>
-        <p:nvSpPr>
-          <p:cNvPr id="4" name="Rounded Rectangle 3"/>
-          <p:cNvSpPr/>
-          <p:nvPr/>
-        </p:nvSpPr>
-        <p:spPr>
-          <a:xfrm>
-            <a:off x="822960" y="1874519"/>
-            <a:ext cx="457200" cy="548640"/>
-          </a:xfrm>
-          <a:prstGeom prst="roundRect">
-            <a:avLst/>
-          </a:prstGeom>
-          <a:solidFill>
-            <a:srgbClr val="CC0066"/>
-          </a:solidFill>
-          <a:ln>
-            <a:noFill/>
-          </a:ln>
-          <a:effectLst/>
-        </p:spPr>
-        <p:style>
-          <a:lnRef idx="1">
-            <a:schemeClr val="accent1"/>
-          </a:lnRef>
-          <a:fillRef idx="3">
-            <a:schemeClr val="accent1"/>
-          </a:fillRef>
-          <a:effectRef idx="2">
-            <a:schemeClr val="accent1"/>
-          </a:effectRef>
-          <a:fontRef idx="minor">
-            <a:schemeClr val="lt1"/>
-          </a:fontRef>
-        </p:style>
-        <p:txBody>
-          <a:bodyPr rtlCol="0" anchor="ctr" lIns="0" rIns="0"/>
-          <a:lstStyle/>
-          <a:p>
-            <a:pPr algn="ctr"/>
-            <a:r>
-              <a:rPr sz="2200" b="1">
-                <a:solidFill>
-                  <a:srgbClr val="FFFFFF"/>
-                </a:solidFill>
-                <a:latin typeface="Calibri"/>
-              </a:rPr>
-              <a:t>1</a:t>
-            </a:r>
-          </a:p>
-        </p:txBody>
-      </p:sp>
-      <p:sp>
-        <p:nvSpPr>
-          <p:cNvPr id="5" name="TextBox 4"/>
-          <p:cNvSpPr txBox="1"/>
-          <p:nvPr/>
-        </p:nvSpPr>
-        <p:spPr>
-          <a:xfrm>
-            <a:off x="1417320" y="1874519"/>
-            <a:ext cx="10058400" cy="320040"/>
-          </a:xfrm>
-          <a:prstGeom prst="rect">
-            <a:avLst/>
-          </a:prstGeom>
-          <a:noFill/>
-        </p:spPr>
-        <p:txBody>
-          <a:bodyPr wrap="square" anchor="t" lIns="45720" rIns="45720">
-            <a:spAutoFit/>
-          </a:bodyPr>
-          <a:lstStyle/>
-          <a:p>
-            <a:pPr algn="l"/>
-            <a:r>
-              <a:rPr sz="1600" b="1" i="0">
-                <a:solidFill>
-                  <a:srgbClr val="663399"/>
-                </a:solidFill>
-                <a:latin typeface="Calibri"/>
-              </a:rPr>
-              <a:t>You can write a new recipe in 5 minutes</a:t>
-            </a:r>
-          </a:p>
-        </p:txBody>
-      </p:sp>
-      <p:sp>
-        <p:nvSpPr>
-          <p:cNvPr id="6" name="TextBox 5"/>
-          <p:cNvSpPr txBox="1"/>
-          <p:nvPr/>
-        </p:nvSpPr>
-        <p:spPr>
-          <a:xfrm>
-            <a:off x="1417320" y="2185415"/>
-            <a:ext cx="10058400" cy="320040"/>
-          </a:xfrm>
-          <a:prstGeom prst="rect">
-            <a:avLst/>
-          </a:prstGeom>
-          <a:noFill/>
-        </p:spPr>
-        <p:txBody>
-          <a:bodyPr wrap="square" anchor="t" lIns="45720" rIns="45720">
-            <a:spAutoFit/>
-          </a:bodyPr>
-          <a:lstStyle/>
-          <a:p>
-            <a:pPr algn="l"/>
-            <a:r>
-              <a:rPr sz="1300" b="0" i="0">
-                <a:solidFill>
-                  <a:srgbClr val="333333"/>
-                </a:solidFill>
-                <a:latin typeface="Calibri"/>
-              </a:rPr>
-              <a:t>Pattern: SRC_URI + S + do_install + LICENSE — the rest is variations</a:t>
-            </a:r>
-          </a:p>
-        </p:txBody>
-      </p:sp>
-      <p:sp>
-        <p:nvSpPr>
-          <p:cNvPr id="7" name="Rounded Rectangle 6"/>
-          <p:cNvSpPr/>
-          <p:nvPr/>
-        </p:nvSpPr>
-        <p:spPr>
-          <a:xfrm>
-            <a:off x="822960" y="2587752"/>
-            <a:ext cx="457200" cy="548640"/>
-          </a:xfrm>
-          <a:prstGeom prst="roundRect">
-            <a:avLst/>
-          </a:prstGeom>
-          <a:solidFill>
-            <a:srgbClr val="CC0066"/>
-          </a:solidFill>
-          <a:ln>
-            <a:noFill/>
-          </a:ln>
-          <a:effectLst/>
-        </p:spPr>
-        <p:style>
-          <a:lnRef idx="1">
-            <a:schemeClr val="accent1"/>
-          </a:lnRef>
-          <a:fillRef idx="3">
-            <a:schemeClr val="accent1"/>
-          </a:fillRef>
-          <a:effectRef idx="2">
-            <a:schemeClr val="accent1"/>
-          </a:effectRef>
-          <a:fontRef idx="minor">
-            <a:schemeClr val="lt1"/>
-          </a:fontRef>
-        </p:style>
-        <p:txBody>
-          <a:bodyPr rtlCol="0" anchor="ctr" lIns="0" rIns="0"/>
-          <a:lstStyle/>
-          <a:p>
-            <a:pPr algn="ctr"/>
-            <a:r>
-              <a:rPr sz="2200" b="1">
-                <a:solidFill>
-                  <a:srgbClr val="FFFFFF"/>
-                </a:solidFill>
-                <a:latin typeface="Calibri"/>
-              </a:rPr>
-              <a:t>2</a:t>
-            </a:r>
-          </a:p>
-        </p:txBody>
-      </p:sp>
-      <p:sp>
-        <p:nvSpPr>
-          <p:cNvPr id="8" name="TextBox 7"/>
-          <p:cNvSpPr txBox="1"/>
-          <p:nvPr/>
-        </p:nvSpPr>
-        <p:spPr>
-          <a:xfrm>
-            <a:off x="1417320" y="2587752"/>
-            <a:ext cx="10058400" cy="320040"/>
-          </a:xfrm>
-          <a:prstGeom prst="rect">
-            <a:avLst/>
-          </a:prstGeom>
-          <a:noFill/>
-        </p:spPr>
-        <p:txBody>
-          <a:bodyPr wrap="square" anchor="t" lIns="45720" rIns="45720">
-            <a:spAutoFit/>
-          </a:bodyPr>
-          <a:lstStyle/>
-          <a:p>
-            <a:pPr algn="l"/>
-            <a:r>
-              <a:rPr sz="1600" b="1" i="0">
-                <a:solidFill>
-                  <a:srgbClr val="663399"/>
-                </a:solidFill>
-                <a:latin typeface="Calibri"/>
-              </a:rPr>
-              <a:t>Failures are diagnostic, not catastrophic</a:t>
-            </a:r>
-          </a:p>
-        </p:txBody>
-      </p:sp>
-      <p:sp>
-        <p:nvSpPr>
-          <p:cNvPr id="9" name="TextBox 8"/>
-          <p:cNvSpPr txBox="1"/>
-          <p:nvPr/>
-        </p:nvSpPr>
-        <p:spPr>
-          <a:xfrm>
-            <a:off x="1417320" y="2898648"/>
-            <a:ext cx="10058400" cy="320040"/>
-          </a:xfrm>
-          <a:prstGeom prst="rect">
-            <a:avLst/>
-          </a:prstGeom>
-          <a:noFill/>
-        </p:spPr>
-        <p:txBody>
-          <a:bodyPr wrap="square" anchor="t" lIns="45720" rIns="45720">
-            <a:spAutoFit/>
-          </a:bodyPr>
-          <a:lstStyle/>
-          <a:p>
-            <a:pPr algn="l"/>
-            <a:r>
-              <a:rPr sz="1300" b="0" i="0">
-                <a:solidFill>
-                  <a:srgbClr val="333333"/>
-                </a:solidFill>
-                <a:latin typeface="Calibri"/>
-              </a:rPr>
-              <a:t>log.do_*, devshell, and bitbake -c &lt;task&gt; -f are your daily tools</a:t>
-            </a:r>
-          </a:p>
-        </p:txBody>
-      </p:sp>
-      <p:sp>
-        <p:nvSpPr>
-          <p:cNvPr id="10" name="Rounded Rectangle 9"/>
-          <p:cNvSpPr/>
-          <p:nvPr/>
-        </p:nvSpPr>
-        <p:spPr>
-          <a:xfrm>
-            <a:off x="822960" y="3300984"/>
-            <a:ext cx="457200" cy="548640"/>
-          </a:xfrm>
-          <a:prstGeom prst="roundRect">
-            <a:avLst/>
-          </a:prstGeom>
-          <a:solidFill>
-            <a:srgbClr val="CC0066"/>
-          </a:solidFill>
-          <a:ln>
-            <a:noFill/>
-          </a:ln>
-          <a:effectLst/>
-        </p:spPr>
-        <p:style>
-          <a:lnRef idx="1">
-            <a:schemeClr val="accent1"/>
-          </a:lnRef>
-          <a:fillRef idx="3">
-            <a:schemeClr val="accent1"/>
-          </a:fillRef>
-          <a:effectRef idx="2">
-            <a:schemeClr val="accent1"/>
-          </a:effectRef>
-          <a:fontRef idx="minor">
-            <a:schemeClr val="lt1"/>
-          </a:fontRef>
-        </p:style>
-        <p:txBody>
-          <a:bodyPr rtlCol="0" anchor="ctr" lIns="0" rIns="0"/>
-          <a:lstStyle/>
-          <a:p>
-            <a:pPr algn="ctr"/>
-            <a:r>
-              <a:rPr sz="2200" b="1">
-                <a:solidFill>
-                  <a:srgbClr val="FFFFFF"/>
-                </a:solidFill>
-                <a:latin typeface="Calibri"/>
-              </a:rPr>
-              <a:t>3</a:t>
-            </a:r>
-          </a:p>
-        </p:txBody>
-      </p:sp>
-      <p:sp>
-        <p:nvSpPr>
-          <p:cNvPr id="11" name="TextBox 10"/>
-          <p:cNvSpPr txBox="1"/>
-          <p:nvPr/>
-        </p:nvSpPr>
-        <p:spPr>
-          <a:xfrm>
-            <a:off x="1417320" y="3300984"/>
-            <a:ext cx="10058400" cy="320040"/>
-          </a:xfrm>
-          <a:prstGeom prst="rect">
-            <a:avLst/>
-          </a:prstGeom>
-          <a:noFill/>
-        </p:spPr>
-        <p:txBody>
-          <a:bodyPr wrap="square" anchor="t" lIns="45720" rIns="45720">
-            <a:spAutoFit/>
-          </a:bodyPr>
-          <a:lstStyle/>
-          <a:p>
-            <a:pPr algn="l"/>
-            <a:r>
-              <a:rPr sz="1600" b="1" i="0">
-                <a:solidFill>
-                  <a:srgbClr val="663399"/>
-                </a:solidFill>
-                <a:latin typeface="Calibri"/>
-              </a:rPr>
-              <a:t>sstate is observable</a:t>
-            </a:r>
-          </a:p>
-        </p:txBody>
-      </p:sp>
-      <p:sp>
-        <p:nvSpPr>
-          <p:cNvPr id="12" name="TextBox 11"/>
-          <p:cNvSpPr txBox="1"/>
-          <p:nvPr/>
-        </p:nvSpPr>
-        <p:spPr>
-          <a:xfrm>
-            <a:off x="1417320" y="3611879"/>
-            <a:ext cx="10058400" cy="320040"/>
-          </a:xfrm>
-          <a:prstGeom prst="rect">
-            <a:avLst/>
-          </a:prstGeom>
-          <a:noFill/>
-        </p:spPr>
-        <p:txBody>
-          <a:bodyPr wrap="square" anchor="t" lIns="45720" rIns="45720">
-            <a:spAutoFit/>
-          </a:bodyPr>
-          <a:lstStyle/>
-          <a:p>
-            <a:pPr algn="l"/>
-            <a:r>
-              <a:rPr sz="1300" b="0" i="0">
-                <a:solidFill>
-                  <a:srgbClr val="333333"/>
-                </a:solidFill>
-                <a:latin typeface="Calibri"/>
-              </a:rPr>
-              <a:t>bitbake -S printdiff and bitbake-diffsigs show exactly what changed</a:t>
-            </a:r>
-          </a:p>
-        </p:txBody>
-      </p:sp>
-      <p:sp>
-        <p:nvSpPr>
-          <p:cNvPr id="13" name="Rounded Rectangle 12"/>
-          <p:cNvSpPr/>
-          <p:nvPr/>
-        </p:nvSpPr>
-        <p:spPr>
-          <a:xfrm>
-            <a:off x="822960" y="4014215"/>
-            <a:ext cx="457200" cy="548640"/>
-          </a:xfrm>
-          <a:prstGeom prst="roundRect">
-            <a:avLst/>
-          </a:prstGeom>
-          <a:solidFill>
-            <a:srgbClr val="CC0066"/>
-          </a:solidFill>
-          <a:ln>
-            <a:noFill/>
-          </a:ln>
-          <a:effectLst/>
-        </p:spPr>
-        <p:style>
-          <a:lnRef idx="1">
-            <a:schemeClr val="accent1"/>
-          </a:lnRef>
-          <a:fillRef idx="3">
-            <a:schemeClr val="accent1"/>
-          </a:fillRef>
-          <a:effectRef idx="2">
-            <a:schemeClr val="accent1"/>
-          </a:effectRef>
-          <a:fontRef idx="minor">
-            <a:schemeClr val="lt1"/>
-          </a:fontRef>
-        </p:style>
-        <p:txBody>
-          <a:bodyPr rtlCol="0" anchor="ctr" lIns="0" rIns="0"/>
-          <a:lstStyle/>
-          <a:p>
-            <a:pPr algn="ctr"/>
-            <a:r>
-              <a:rPr sz="2200" b="1">
-                <a:solidFill>
-                  <a:srgbClr val="FFFFFF"/>
-                </a:solidFill>
-                <a:latin typeface="Calibri"/>
-              </a:rPr>
-              <a:t>4</a:t>
-            </a:r>
-          </a:p>
-        </p:txBody>
-      </p:sp>
-      <p:sp>
-        <p:nvSpPr>
-          <p:cNvPr id="14" name="TextBox 13"/>
-          <p:cNvSpPr txBox="1"/>
-          <p:nvPr/>
-        </p:nvSpPr>
-        <p:spPr>
-          <a:xfrm>
-            <a:off x="1417320" y="4014215"/>
-            <a:ext cx="10058400" cy="320040"/>
-          </a:xfrm>
-          <a:prstGeom prst="rect">
-            <a:avLst/>
-          </a:prstGeom>
-          <a:noFill/>
-        </p:spPr>
-        <p:txBody>
-          <a:bodyPr wrap="square" anchor="t" lIns="45720" rIns="45720">
-            <a:spAutoFit/>
-          </a:bodyPr>
-          <a:lstStyle/>
-          <a:p>
-            <a:pPr algn="l"/>
-            <a:r>
-              <a:rPr sz="1600" b="1" i="0">
-                <a:solidFill>
-                  <a:srgbClr val="663399"/>
-                </a:solidFill>
-                <a:latin typeface="Calibri"/>
-              </a:rPr>
-              <a:t>PACKAGE_CLASSES is a one-line switch</a:t>
-            </a:r>
-          </a:p>
-        </p:txBody>
-      </p:sp>
-      <p:sp>
-        <p:nvSpPr>
-          <p:cNvPr id="15" name="TextBox 14"/>
-          <p:cNvSpPr txBox="1"/>
-          <p:nvPr/>
-        </p:nvSpPr>
-        <p:spPr>
-          <a:xfrm>
-            <a:off x="1417320" y="4325112"/>
-            <a:ext cx="10058400" cy="320040"/>
-          </a:xfrm>
-          <a:prstGeom prst="rect">
-            <a:avLst/>
-          </a:prstGeom>
-          <a:noFill/>
-        </p:spPr>
-        <p:txBody>
-          <a:bodyPr wrap="square" anchor="t" lIns="45720" rIns="45720">
-            <a:spAutoFit/>
-          </a:bodyPr>
-          <a:lstStyle/>
-          <a:p>
-            <a:pPr algn="l"/>
-            <a:r>
-              <a:rPr sz="1300" b="0" i="0">
-                <a:solidFill>
-                  <a:srgbClr val="333333"/>
-                </a:solidFill>
-                <a:latin typeface="Calibri"/>
-              </a:rPr>
-              <a:t>But it cascades through the whole package set — observe sstate behavior</a:t>
-            </a:r>
-          </a:p>
-        </p:txBody>
-      </p:sp>
-      <p:sp>
-        <p:nvSpPr>
-          <p:cNvPr id="16" name="Rounded Rectangle 15"/>
-          <p:cNvSpPr/>
-          <p:nvPr/>
-        </p:nvSpPr>
-        <p:spPr>
-          <a:xfrm>
-            <a:off x="822960" y="4727448"/>
-            <a:ext cx="457200" cy="548640"/>
-          </a:xfrm>
-          <a:prstGeom prst="roundRect">
-            <a:avLst/>
-          </a:prstGeom>
-          <a:solidFill>
-            <a:srgbClr val="CC0066"/>
-          </a:solidFill>
-          <a:ln>
-            <a:noFill/>
-          </a:ln>
-          <a:effectLst/>
-        </p:spPr>
-        <p:style>
-          <a:lnRef idx="1">
-            <a:schemeClr val="accent1"/>
-          </a:lnRef>
-          <a:fillRef idx="3">
-            <a:schemeClr val="accent1"/>
-          </a:fillRef>
-          <a:effectRef idx="2">
-            <a:schemeClr val="accent1"/>
-          </a:effectRef>
-          <a:fontRef idx="minor">
-            <a:schemeClr val="lt1"/>
-          </a:fontRef>
-        </p:style>
-        <p:txBody>
-          <a:bodyPr rtlCol="0" anchor="ctr" lIns="0" rIns="0"/>
-          <a:lstStyle/>
-          <a:p>
-            <a:pPr algn="ctr"/>
-            <a:r>
-              <a:rPr sz="2200" b="1">
-                <a:solidFill>
-                  <a:srgbClr val="FFFFFF"/>
-                </a:solidFill>
-                <a:latin typeface="Calibri"/>
-              </a:rPr>
-              <a:t>5</a:t>
-            </a:r>
-          </a:p>
-        </p:txBody>
-      </p:sp>
-      <p:sp>
-        <p:nvSpPr>
-          <p:cNvPr id="17" name="TextBox 16"/>
-          <p:cNvSpPr txBox="1"/>
-          <p:nvPr/>
-        </p:nvSpPr>
-        <p:spPr>
-          <a:xfrm>
-            <a:off x="1417320" y="4727448"/>
-            <a:ext cx="10058400" cy="320040"/>
-          </a:xfrm>
-          <a:prstGeom prst="rect">
-            <a:avLst/>
-          </a:prstGeom>
-          <a:noFill/>
-        </p:spPr>
-        <p:txBody>
-          <a:bodyPr wrap="square" anchor="t" lIns="45720" rIns="45720">
-            <a:spAutoFit/>
-          </a:bodyPr>
-          <a:lstStyle/>
-          <a:p>
-            <a:pPr algn="l"/>
-            <a:r>
-              <a:rPr sz="1600" b="1" i="0">
-                <a:solidFill>
-                  <a:srgbClr val="663399"/>
-                </a:solidFill>
-                <a:latin typeface="Calibri"/>
-              </a:rPr>
-              <a:t>You're done with the Yocto-engineering half of the course</a:t>
-            </a:r>
-          </a:p>
-        </p:txBody>
-      </p:sp>
-      <p:sp>
-        <p:nvSpPr>
-          <p:cNvPr id="18" name="TextBox 17"/>
-          <p:cNvSpPr txBox="1"/>
-          <p:nvPr/>
-        </p:nvSpPr>
-        <p:spPr>
-          <a:xfrm>
-            <a:off x="1417320" y="5038344"/>
-            <a:ext cx="10058400" cy="320040"/>
-          </a:xfrm>
-          <a:prstGeom prst="rect">
-            <a:avLst/>
-          </a:prstGeom>
-          <a:noFill/>
-        </p:spPr>
-        <p:txBody>
-          <a:bodyPr wrap="square" anchor="t" lIns="45720" rIns="45720">
-            <a:spAutoFit/>
-          </a:bodyPr>
-          <a:lstStyle/>
-          <a:p>
-            <a:pPr algn="l"/>
-            <a:r>
-              <a:rPr sz="1300" b="0" i="0">
-                <a:solidFill>
-                  <a:srgbClr val="333333"/>
-                </a:solidFill>
-                <a:latin typeface="Calibri"/>
-              </a:rPr>
-              <a:t>Day 3 moves to productization: hardening, compliance, CVE, SBOM, QA</a:t>
-            </a:r>
-          </a:p>
-        </p:txBody>
-      </p:sp>
-      <p:sp>
-        <p:nvSpPr>
-          <p:cNvPr id="19" name="Rounded Rectangle 18"/>
-          <p:cNvSpPr/>
-          <p:nvPr/>
-        </p:nvSpPr>
-        <p:spPr>
-          <a:xfrm>
-            <a:off x="822960" y="5669280"/>
-            <a:ext cx="10561320" cy="640080"/>
-          </a:xfrm>
-          <a:prstGeom prst="roundRect">
-            <a:avLst/>
-          </a:prstGeom>
-          <a:solidFill>
-            <a:srgbClr val="FBE6F0"/>
-          </a:solidFill>
-          <a:ln>
-            <a:noFill/>
-          </a:ln>
-          <a:effectLst/>
-        </p:spPr>
-        <p:style>
-          <a:lnRef idx="1">
-            <a:schemeClr val="accent1"/>
-          </a:lnRef>
-          <a:fillRef idx="3">
-            <a:schemeClr val="accent1"/>
-          </a:fillRef>
-          <a:effectRef idx="2">
-            <a:schemeClr val="accent1"/>
-          </a:effectRef>
-          <a:fontRef idx="minor">
-            <a:schemeClr val="lt1"/>
-          </a:fontRef>
-        </p:style>
-        <p:txBody>
-          <a:bodyPr rtlCol="0" anchor="ctr" lIns="228600"/>
-          <a:lstStyle/>
-          <a:p>
-            <a:pPr algn="ctr"/>
-            <a:r>
-              <a:rPr sz="1400" b="1">
-                <a:solidFill>
-                  <a:srgbClr val="663399"/>
-                </a:solidFill>
-                <a:latin typeface="Calibri"/>
-              </a:rPr>
-              <a:t>Next session  →  </a:t>
-            </a:r>
-            <a:r>
-              <a:rPr sz="1400">
-                <a:solidFill>
-                  <a:srgbClr val="333333"/>
-                </a:solidFill>
-                <a:latin typeface="Calibri"/>
-              </a:rPr>
-              <a:t>Day 3 — Hardening, DT debugging, compliance, CVE/SBOM/QA</a:t>
-            </a:r>
-          </a:p>
-        </p:txBody>
-      </p:sp>
-    </p:spTree>
-  </p:cSld>
-  <p:clrMapOvr>
-    <a:masterClrMapping/>
-  </p:clrMapOvr>
-</p:sld>
-</file>
-
-<file path=ppt/slides/slide7.xml><?xml version="1.0" encoding="utf-8"?>
-<p:sld xmlns:a="http://schemas.openxmlformats.org/drawingml/2006/main" xmlns:p="http://schemas.openxmlformats.org/presentationml/2006/main" xmlns:r="http://schemas.openxmlformats.org/officeDocument/2006/relationships">
-  <p:cSld>
-    <p:spTree>
-      <p:nvGrpSpPr>
-        <p:cNvPr id="1" name=""/>
-        <p:cNvGrpSpPr/>
-        <p:nvPr/>
-      </p:nvGrpSpPr>
-      <p:grpSpPr/>
-      <p:sp>
-        <p:nvSpPr>
-          <p:cNvPr id="2" name="Title 1"/>
-          <p:cNvSpPr>
-            <a:spLocks noGrp="1"/>
-          </p:cNvSpPr>
-          <p:nvPr>
-            <p:ph type="ctrTitle"/>
-          </p:nvPr>
-        </p:nvSpPr>
-        <p:spPr/>
-        <p:txBody>
-          <a:bodyPr/>
-          <a:lstStyle/>
-          <a:p>
-            <a:r>
-              <a:rPr sz="4400" b="1">
-                <a:solidFill>
-                  <a:srgbClr val="FFFFFF"/>
-                </a:solidFill>
-                <a:latin typeface="Calibri"/>
-              </a:rPr>
-              <a:t>Day 2 Hands-On</a:t>
-            </a:r>
-          </a:p>
-        </p:txBody>
-      </p:sp>
-      <p:sp>
-        <p:nvSpPr>
-          <p:cNvPr id="3" name="Subtitle 2"/>
-          <p:cNvSpPr>
-            <a:spLocks noGrp="1"/>
-          </p:cNvSpPr>
-          <p:nvPr>
-            <p:ph type="subTitle" idx="1"/>
-          </p:nvPr>
-        </p:nvSpPr>
-        <p:spPr/>
-        <p:txBody>
-          <a:bodyPr/>
-          <a:lstStyle/>
-          <a:p>
-            <a:r>
-              <a:rPr sz="2200" i="1">
-                <a:solidFill>
-                  <a:srgbClr val="FFFFFF"/>
-                </a:solidFill>
-                <a:latin typeface="Calibri"/>
-              </a:rPr>
-              <a:t>Day 2 • Session 7 • 45 minutes</a:t>
-            </a:r>
-          </a:p>
-          <a:p>
-            <a:r>
-              <a:rPr sz="1800">
-                <a:solidFill>
-                  <a:srgbClr val="FFFFFF"/>
-                </a:solidFill>
-                <a:latin typeface="Calibri"/>
-              </a:rPr>
-              <a:t>Apply recipes, debugging, and performance to TrainerGW</a:t>
-            </a:r>
-          </a:p>
-        </p:txBody>
-      </p:sp>
-    </p:spTree>
-  </p:cSld>
-  <p:clrMapOvr>
-    <a:masterClrMapping/>
-  </p:clrMapOvr>
-</p:sld>
-</file>
-
-<file path=ppt/slides/slide8.xml><?xml version="1.0" encoding="utf-8"?>
-<p:sld xmlns:a="http://schemas.openxmlformats.org/drawingml/2006/main" xmlns:p="http://schemas.openxmlformats.org/presentationml/2006/main" xmlns:r="http://schemas.openxmlformats.org/officeDocument/2006/relationships">
-  <p:cSld>
-    <p:spTree>
-      <p:nvGrpSpPr>
-        <p:cNvPr id="1" name=""/>
-        <p:cNvGrpSpPr/>
-        <p:nvPr/>
-      </p:nvGrpSpPr>
-      <p:grpSpPr/>
-      <p:sp>
-        <p:nvSpPr>
-          <p:cNvPr id="2" name="Title 1"/>
-          <p:cNvSpPr>
-            <a:spLocks noGrp="1"/>
-          </p:cNvSpPr>
-          <p:nvPr>
-            <p:ph type="title"/>
-          </p:nvPr>
-        </p:nvSpPr>
-        <p:spPr/>
-        <p:txBody>
-          <a:bodyPr/>
-          <a:lstStyle/>
-          <a:p>
-            <a:r>
-              <a:rPr sz="3200" b="1">
-                <a:solidFill>
-                  <a:srgbClr val="CC0066"/>
-                </a:solidFill>
-                <a:latin typeface="Calibri"/>
-              </a:rPr>
-              <a:t>Session Agenda</a:t>
-            </a:r>
-          </a:p>
-        </p:txBody>
-      </p:sp>
-      <p:sp>
-        <p:nvSpPr>
-          <p:cNvPr id="3" name="TextBox 2"/>
-          <p:cNvSpPr txBox="1"/>
-          <p:nvPr/>
-        </p:nvSpPr>
-        <p:spPr>
-          <a:xfrm>
-            <a:off x="822960" y="1463040"/>
-            <a:ext cx="10515600" cy="5029200"/>
-          </a:xfrm>
-          <a:prstGeom prst="rect">
-            <a:avLst/>
-          </a:prstGeom>
-          <a:noFill/>
-        </p:spPr>
-        <p:txBody>
-          <a:bodyPr wrap="square" lIns="45720" rIns="45720">
-            <a:spAutoFit/>
-          </a:bodyPr>
-          <a:lstStyle/>
-          <a:p>
-            <a:pPr>
-              <a:spcAft>
-                <a:spcPts val="600"/>
-              </a:spcAft>
-            </a:pPr>
-            <a:r>
-              <a:rPr sz="2000" b="0" i="0">
-                <a:solidFill>
-                  <a:srgbClr val="333333"/>
-                </a:solidFill>
-                <a:latin typeface="Calibri"/>
-              </a:rPr>
-              <a:t>1.  Add a new recipe with patches</a:t>
-            </a:r>
-          </a:p>
-          <a:p>
-            <a:pPr>
-              <a:spcAft>
-                <a:spcPts val="600"/>
-              </a:spcAft>
-            </a:pPr>
-            <a:r>
-              <a:rPr sz="2000" b="0" i="0">
-                <a:solidFill>
-                  <a:srgbClr val="333333"/>
-                </a:solidFill>
-                <a:latin typeface="Calibri"/>
-              </a:rPr>
-              <a:t>2.  Trigger a build failure deliberately</a:t>
-            </a:r>
-          </a:p>
-          <a:p>
-            <a:pPr>
-              <a:spcAft>
-                <a:spcPts val="600"/>
-              </a:spcAft>
-            </a:pPr>
-            <a:r>
-              <a:rPr sz="2000" b="0" i="0">
-                <a:solidFill>
-                  <a:srgbClr val="333333"/>
-                </a:solidFill>
-                <a:latin typeface="Calibri"/>
-              </a:rPr>
-              <a:t>3.  Diagnose and fix</a:t>
-            </a:r>
-          </a:p>
-          <a:p>
-            <a:pPr>
-              <a:spcAft>
-                <a:spcPts val="600"/>
-              </a:spcAft>
-            </a:pPr>
-            <a:r>
-              <a:rPr sz="2000" b="0" i="0">
-                <a:solidFill>
-                  <a:srgbClr val="333333"/>
-                </a:solidFill>
-                <a:latin typeface="Calibri"/>
-              </a:rPr>
-              <a:t>4.  Inspect sstate behavior</a:t>
-            </a:r>
-          </a:p>
-          <a:p>
-            <a:pPr>
-              <a:spcAft>
-                <a:spcPts val="600"/>
-              </a:spcAft>
-            </a:pPr>
-            <a:r>
-              <a:rPr sz="2000" b="0" i="0">
-                <a:solidFill>
-                  <a:srgbClr val="333333"/>
-                </a:solidFill>
-                <a:latin typeface="Calibri"/>
-              </a:rPr>
-              <a:t>5.  Switch package class and observe</a:t>
-            </a:r>
-          </a:p>
-        </p:txBody>
-      </p:sp>
-    </p:spTree>
-  </p:cSld>
-  <p:clrMapOvr>
-    <a:masterClrMapping/>
-  </p:clrMapOvr>
-</p:sld>
-</file>
-
-<file path=ppt/slides/slide9.xml><?xml version="1.0" encoding="utf-8"?>
-<p:sld xmlns:a="http://schemas.openxmlformats.org/drawingml/2006/main" xmlns:p="http://schemas.openxmlformats.org/presentationml/2006/main" xmlns:r="http://schemas.openxmlformats.org/officeDocument/2006/relationships">
-  <p:cSld>
-    <p:spTree>
-      <p:nvGrpSpPr>
-        <p:cNvPr id="1" name=""/>
-        <p:cNvGrpSpPr/>
-        <p:nvPr/>
-      </p:nvGrpSpPr>
-      <p:grpSpPr/>
-      <p:sp>
-        <p:nvSpPr>
-          <p:cNvPr id="2" name="Title 1"/>
-          <p:cNvSpPr>
-            <a:spLocks noGrp="1"/>
-          </p:cNvSpPr>
-          <p:nvPr>
-            <p:ph type="title"/>
-          </p:nvPr>
-        </p:nvSpPr>
-        <p:spPr/>
-        <p:txBody>
-          <a:bodyPr/>
-          <a:lstStyle/>
-          <a:p>
-            <a:r>
-              <a:rPr sz="3200" b="1">
-                <a:solidFill>
-                  <a:srgbClr val="CC0066"/>
-                </a:solidFill>
-                <a:latin typeface="Calibri"/>
-              </a:rPr>
-              <a:t>Step 1 — Add a New Recipe With Patches</a:t>
-            </a:r>
-          </a:p>
-        </p:txBody>
-      </p:sp>
-      <p:sp>
-        <p:nvSpPr>
-          <p:cNvPr id="3" name="TextBox 2"/>
-          <p:cNvSpPr txBox="1"/>
-          <p:nvPr/>
-        </p:nvSpPr>
-        <p:spPr>
-          <a:xfrm>
-            <a:off x="822960" y="1417320"/>
-            <a:ext cx="10515600" cy="365760"/>
-          </a:xfrm>
-          <a:prstGeom prst="rect">
-            <a:avLst/>
-          </a:prstGeom>
-          <a:noFill/>
-        </p:spPr>
-        <p:txBody>
-          <a:bodyPr wrap="square" anchor="t" lIns="45720" rIns="45720">
-            <a:spAutoFit/>
-          </a:bodyPr>
-          <a:lstStyle/>
-          <a:p>
-            <a:pPr algn="l"/>
-            <a:r>
-              <a:rPr sz="1500" b="0" i="1">
-                <a:solidFill>
-                  <a:srgbClr val="666666"/>
-                </a:solidFill>
-                <a:latin typeface="Calibri"/>
-              </a:rPr>
-              <a:t>Pick a real upstream project. Patch one file.</a:t>
+              <a:t>Rebuild the image with a different package format. Observe.</a:t>
             </a:r>
           </a:p>
         </p:txBody>
@@ -7771,6 +7165,7 @@
           <a:lstStyle/>
           <a:p>
             <a:pPr algn="ctr"/>
+            <a:endParaRPr/>
           </a:p>
         </p:txBody>
       </p:sp>
@@ -7815,6 +7210,7 @@
           <a:lstStyle/>
           <a:p>
             <a:pPr algn="ctr"/>
+            <a:endParaRPr/>
           </a:p>
         </p:txBody>
       </p:sp>
@@ -7827,7 +7223,7 @@
         <p:spPr>
           <a:xfrm>
             <a:off x="1005840" y="1874519"/>
-            <a:ext cx="10241280" cy="4389120"/>
+            <a:ext cx="10241280" cy="4185761"/>
           </a:xfrm>
           <a:prstGeom prst="rect">
             <a:avLst/>
@@ -7846,13 +7242,31 @@
               </a:spcAft>
             </a:pPr>
             <a:r>
-              <a:rPr sz="1000" i="1">
+              <a:rPr sz="1400" i="1" dirty="0">
                 <a:solidFill>
                   <a:srgbClr val="808080"/>
                 </a:solidFill>
                 <a:latin typeface="Consolas"/>
               </a:rPr>
-              <a:t># In meta-trainerdemo, add a recipe for 'figlet' (it's small)</a:t>
+              <a:t># Backup </a:t>
+            </a:r>
+            <a:r>
+              <a:rPr sz="1400" i="1" dirty="0" err="1">
+                <a:solidFill>
+                  <a:srgbClr val="808080"/>
+                </a:solidFill>
+                <a:latin typeface="Consolas"/>
+              </a:rPr>
+              <a:t>local.conf</a:t>
+            </a:r>
+            <a:r>
+              <a:rPr sz="1400" i="1" dirty="0">
+                <a:solidFill>
+                  <a:srgbClr val="808080"/>
+                </a:solidFill>
+                <a:latin typeface="Consolas"/>
+              </a:rPr>
+              <a:t> first</a:t>
             </a:r>
           </a:p>
           <a:p>
@@ -7862,12 +7276,61 @@
               </a:spcAft>
             </a:pPr>
             <a:r>
-              <a:rPr sz="1000">
+              <a:rPr sz="1400" dirty="0">
                 <a:solidFill>
                   <a:srgbClr val="2D2D2D"/>
                 </a:solidFill>
                 <a:latin typeface="Consolas"/>
               </a:rPr>
+              <a:t>cp conf/</a:t>
+            </a:r>
+            <a:r>
+              <a:rPr sz="1400" dirty="0" err="1">
+                <a:solidFill>
+                  <a:srgbClr val="2D2D2D"/>
+                </a:solidFill>
+                <a:latin typeface="Consolas"/>
+              </a:rPr>
+              <a:t>local.conf</a:t>
+            </a:r>
+            <a:r>
+              <a:rPr sz="1400" dirty="0">
+                <a:solidFill>
+                  <a:srgbClr val="2D2D2D"/>
+                </a:solidFill>
+                <a:latin typeface="Consolas"/>
+              </a:rPr>
+              <a:t> conf/</a:t>
+            </a:r>
+            <a:r>
+              <a:rPr sz="1400" dirty="0" err="1">
+                <a:solidFill>
+                  <a:srgbClr val="2D2D2D"/>
+                </a:solidFill>
+                <a:latin typeface="Consolas"/>
+              </a:rPr>
+              <a:t>local.conf.bak</a:t>
+            </a:r>
+            <a:endParaRPr sz="1400" dirty="0">
+              <a:solidFill>
+                <a:srgbClr val="2D2D2D"/>
+              </a:solidFill>
+              <a:latin typeface="Consolas"/>
+            </a:endParaRPr>
+          </a:p>
+          <a:p>
+            <a:pPr>
+              <a:spcAft>
+                <a:spcPts val="0"/>
+              </a:spcAft>
+            </a:pPr>
+            <a:r>
+              <a:rPr sz="1400" dirty="0">
+                <a:solidFill>
+                  <a:srgbClr val="2D2D2D"/>
+                </a:solidFill>
+                <a:latin typeface="Consolas"/>
+              </a:rPr>
               <a:t> </a:t>
             </a:r>
           </a:p>
@@ -7878,14 +7341,99 @@
               </a:spcAft>
             </a:pPr>
             <a:r>
-              <a:rPr sz="1000">
+              <a:rPr sz="1400" i="1" dirty="0">
+                <a:solidFill>
+                  <a:srgbClr val="808080"/>
+                </a:solidFill>
+                <a:latin typeface="Consolas"/>
+              </a:rPr>
+              <a:t># Change to </a:t>
+            </a:r>
+            <a:r>
+              <a:rPr sz="1400" i="1" dirty="0" err="1">
+                <a:solidFill>
+                  <a:srgbClr val="808080"/>
+                </a:solidFill>
+                <a:latin typeface="Consolas"/>
+              </a:rPr>
+              <a:t>ipk</a:t>
+            </a:r>
+            <a:r>
+              <a:rPr sz="1400" i="1" dirty="0">
+                <a:solidFill>
+                  <a:srgbClr val="808080"/>
+                </a:solidFill>
+                <a:latin typeface="Consolas"/>
+              </a:rPr>
+              <a:t> packaging</a:t>
+            </a:r>
+          </a:p>
+          <a:p>
+            <a:pPr>
+              <a:spcAft>
+                <a:spcPts val="0"/>
+              </a:spcAft>
+            </a:pPr>
+            <a:r>
+              <a:rPr sz="1400" dirty="0">
                 <a:solidFill>
                   <a:srgbClr val="2D2D2D"/>
                 </a:solidFill>
                 <a:latin typeface="Consolas"/>
               </a:rPr>
-              <a:t>mkdir -p ../meta-trainerdemo/recipes-trainergw/figlet/files</a:t>
-            </a:r>
+              <a:t>sed -</a:t>
+            </a:r>
+            <a:r>
+              <a:rPr sz="1400" dirty="0" err="1">
+                <a:solidFill>
+                  <a:srgbClr val="2D2D2D"/>
+                </a:solidFill>
+                <a:latin typeface="Consolas"/>
+              </a:rPr>
+              <a:t>i</a:t>
+            </a:r>
+            <a:r>
+              <a:rPr sz="1400" dirty="0">
+                <a:solidFill>
+                  <a:srgbClr val="2D2D2D"/>
+                </a:solidFill>
+                <a:latin typeface="Consolas"/>
+              </a:rPr>
+              <a:t> 's/PACKAGE_CLASSES.*/PACKAGE_CLASSES = "</a:t>
+            </a:r>
+            <a:r>
+              <a:rPr sz="1400" dirty="0" err="1">
+                <a:solidFill>
+                  <a:srgbClr val="2D2D2D"/>
+                </a:solidFill>
+                <a:latin typeface="Consolas"/>
+              </a:rPr>
+              <a:t>package_ipk</a:t>
+            </a:r>
+            <a:r>
+              <a:rPr sz="1400" dirty="0">
+                <a:solidFill>
+                  <a:srgbClr val="2D2D2D"/>
+                </a:solidFill>
+                <a:latin typeface="Consolas"/>
+              </a:rPr>
+              <a:t>"/' conf/</a:t>
+            </a:r>
+            <a:r>
+              <a:rPr sz="1400" dirty="0" err="1">
+                <a:solidFill>
+                  <a:srgbClr val="2D2D2D"/>
+                </a:solidFill>
+                <a:latin typeface="Consolas"/>
+              </a:rPr>
+              <a:t>local.conf</a:t>
+            </a:r>
+            <a:endParaRPr sz="1400" dirty="0">
+              <a:solidFill>
+                <a:srgbClr val="2D2D2D"/>
+              </a:solidFill>
+              <a:latin typeface="Consolas"/>
+            </a:endParaRPr>
           </a:p>
           <a:p>
             <a:pPr>
@@ -7894,7 +7442,7 @@
               </a:spcAft>
             </a:pPr>
             <a:r>
-              <a:rPr sz="1000">
+              <a:rPr sz="1400" dirty="0">
                 <a:solidFill>
                   <a:srgbClr val="2D2D2D"/>
                 </a:solidFill>
@@ -7910,14 +7458,81 @@
               </a:spcAft>
             </a:pPr>
             <a:r>
-              <a:rPr sz="1000">
+              <a:rPr sz="1400" i="1" dirty="0">
+                <a:solidFill>
+                  <a:srgbClr val="808080"/>
+                </a:solidFill>
+                <a:latin typeface="Consolas"/>
+              </a:rPr>
+              <a:t># Or add the line if not present</a:t>
+            </a:r>
+          </a:p>
+          <a:p>
+            <a:pPr>
+              <a:spcAft>
+                <a:spcPts val="0"/>
+              </a:spcAft>
+            </a:pPr>
+            <a:r>
+              <a:rPr sz="1400" dirty="0">
                 <a:solidFill>
                   <a:srgbClr val="2D2D2D"/>
                 </a:solidFill>
                 <a:latin typeface="Consolas"/>
               </a:rPr>
-              <a:t>cat &gt; ../meta-trainerdemo/recipes-trainergw/figlet/figlet_2.2.5.bb &lt;&lt;'EOF'</a:t>
-            </a:r>
+              <a:t>grep -q PACKAGE_CLASSES conf/</a:t>
+            </a:r>
+            <a:r>
+              <a:rPr sz="1400" dirty="0" err="1">
+                <a:solidFill>
+                  <a:srgbClr val="2D2D2D"/>
+                </a:solidFill>
+                <a:latin typeface="Consolas"/>
+              </a:rPr>
+              <a:t>local.conf</a:t>
+            </a:r>
+            <a:r>
+              <a:rPr sz="1400" dirty="0">
+                <a:solidFill>
+                  <a:srgbClr val="2D2D2D"/>
+                </a:solidFill>
+                <a:latin typeface="Consolas"/>
+              </a:rPr>
+              <a:t> || echo 'PACKAGE_CLASSES = "</a:t>
+            </a:r>
+            <a:r>
+              <a:rPr sz="1400" dirty="0" err="1">
+                <a:solidFill>
+                  <a:srgbClr val="2D2D2D"/>
+                </a:solidFill>
+                <a:latin typeface="Consolas"/>
+              </a:rPr>
+              <a:t>package_ipk</a:t>
+            </a:r>
+            <a:r>
+              <a:rPr sz="1400" dirty="0">
+                <a:solidFill>
+                  <a:srgbClr val="2D2D2D"/>
+                </a:solidFill>
+                <a:latin typeface="Consolas"/>
+              </a:rPr>
+              <a:t>"' &gt;&gt; conf/</a:t>
+            </a:r>
+            <a:r>
+              <a:rPr sz="1400" dirty="0" err="1">
+                <a:solidFill>
+                  <a:srgbClr val="2D2D2D"/>
+                </a:solidFill>
+                <a:latin typeface="Consolas"/>
+              </a:rPr>
+              <a:t>local.conf</a:t>
+            </a:r>
+            <a:endParaRPr sz="1400" dirty="0">
+              <a:solidFill>
+                <a:srgbClr val="2D2D2D"/>
+              </a:solidFill>
+              <a:latin typeface="Consolas"/>
+            </a:endParaRPr>
           </a:p>
           <a:p>
             <a:pPr>
@@ -7926,13 +7541,13 @@
               </a:spcAft>
             </a:pPr>
             <a:r>
-              <a:rPr sz="1000">
+              <a:rPr sz="1400" dirty="0">
                 <a:solidFill>
                   <a:srgbClr val="2D2D2D"/>
                 </a:solidFill>
                 <a:latin typeface="Consolas"/>
               </a:rPr>
-              <a:t>SUMMARY = "Display large characters made up of ordinary screen characters"</a:t>
+              <a:t> </a:t>
             </a:r>
           </a:p>
           <a:p>
@@ -7942,13 +7557,56 @@
               </a:spcAft>
             </a:pPr>
             <a:r>
-              <a:rPr sz="1000">
+              <a:rPr sz="1400" i="1" dirty="0">
+                <a:solidFill>
+                  <a:srgbClr val="808080"/>
+                </a:solidFill>
+                <a:latin typeface="Consolas"/>
+              </a:rPr>
+              <a:t># Rebuild — note </a:t>
+            </a:r>
+            <a:r>
+              <a:rPr sz="1400" i="1" dirty="0" err="1">
+                <a:solidFill>
+                  <a:srgbClr val="808080"/>
+                </a:solidFill>
+                <a:latin typeface="Consolas"/>
+              </a:rPr>
+              <a:t>sstate</a:t>
+            </a:r>
+            <a:r>
+              <a:rPr sz="1400" i="1" dirty="0">
+                <a:solidFill>
+                  <a:srgbClr val="808080"/>
+                </a:solidFill>
+                <a:latin typeface="Consolas"/>
+              </a:rPr>
+              <a:t> hits/misses</a:t>
+            </a:r>
+          </a:p>
+          <a:p>
+            <a:pPr>
+              <a:spcAft>
+                <a:spcPts val="0"/>
+              </a:spcAft>
+            </a:pPr>
+            <a:r>
+              <a:rPr sz="1400" dirty="0" err="1">
                 <a:solidFill>
                   <a:srgbClr val="2D2D2D"/>
                 </a:solidFill>
                 <a:latin typeface="Consolas"/>
               </a:rPr>
-              <a:t>LICENSE = "BSD-3-Clause"</a:t>
+              <a:t>bitbake</a:t>
+            </a:r>
+            <a:r>
+              <a:rPr sz="1400" dirty="0">
+                <a:solidFill>
+                  <a:srgbClr val="2D2D2D"/>
+                </a:solidFill>
+                <a:latin typeface="Consolas"/>
+              </a:rPr>
+              <a:t> core-image-base</a:t>
             </a:r>
           </a:p>
           <a:p>
@@ -7958,13 +7616,13 @@
               </a:spcAft>
             </a:pPr>
             <a:r>
-              <a:rPr sz="1000">
+              <a:rPr sz="1400" dirty="0">
                 <a:solidFill>
                   <a:srgbClr val="2D2D2D"/>
                 </a:solidFill>
                 <a:latin typeface="Consolas"/>
               </a:rPr>
-              <a:t>LIC_FILES_CHKSUM = "file://LICENSE;md5=..."</a:t>
+              <a:t> </a:t>
             </a:r>
           </a:p>
           <a:p>
@@ -7974,12 +7632,148 @@
               </a:spcAft>
             </a:pPr>
             <a:r>
-              <a:rPr sz="1000">
+              <a:rPr sz="1400" i="1" dirty="0">
+                <a:solidFill>
+                  <a:srgbClr val="808080"/>
+                </a:solidFill>
+                <a:latin typeface="Consolas"/>
+              </a:rPr>
+              <a:t># Compare deploy directories</a:t>
+            </a:r>
+          </a:p>
+          <a:p>
+            <a:pPr>
+              <a:spcAft>
+                <a:spcPts val="0"/>
+              </a:spcAft>
+            </a:pPr>
+            <a:r>
+              <a:rPr sz="1400" dirty="0">
                 <a:solidFill>
                   <a:srgbClr val="2D2D2D"/>
                 </a:solidFill>
                 <a:latin typeface="Consolas"/>
               </a:rPr>
+              <a:t>ls </a:t>
+            </a:r>
+            <a:r>
+              <a:rPr sz="1400" dirty="0" err="1">
+                <a:solidFill>
+                  <a:srgbClr val="2D2D2D"/>
+                </a:solidFill>
+                <a:latin typeface="Consolas"/>
+              </a:rPr>
+              <a:t>tmp</a:t>
+            </a:r>
+            <a:r>
+              <a:rPr sz="1400" dirty="0">
+                <a:solidFill>
+                  <a:srgbClr val="2D2D2D"/>
+                </a:solidFill>
+                <a:latin typeface="Consolas"/>
+              </a:rPr>
+              <a:t>/deploy/</a:t>
+            </a:r>
+            <a:r>
+              <a:rPr sz="1400" dirty="0" err="1">
+                <a:solidFill>
+                  <a:srgbClr val="2D2D2D"/>
+                </a:solidFill>
+                <a:latin typeface="Consolas"/>
+              </a:rPr>
+              <a:t>ipk</a:t>
+            </a:r>
+            <a:r>
+              <a:rPr sz="1400" dirty="0">
+                <a:solidFill>
+                  <a:srgbClr val="2D2D2D"/>
+                </a:solidFill>
+                <a:latin typeface="Consolas"/>
+              </a:rPr>
+              <a:t>/  2&gt;/dev/null | head</a:t>
+            </a:r>
+          </a:p>
+          <a:p>
+            <a:pPr>
+              <a:spcAft>
+                <a:spcPts val="0"/>
+              </a:spcAft>
+            </a:pPr>
+            <a:r>
+              <a:rPr sz="1400" dirty="0">
+                <a:solidFill>
+                  <a:srgbClr val="2D2D2D"/>
+                </a:solidFill>
+                <a:latin typeface="Consolas"/>
+              </a:rPr>
+              <a:t>ls </a:t>
+            </a:r>
+            <a:r>
+              <a:rPr sz="1400" dirty="0" err="1">
+                <a:solidFill>
+                  <a:srgbClr val="2D2D2D"/>
+                </a:solidFill>
+                <a:latin typeface="Consolas"/>
+              </a:rPr>
+              <a:t>tmp</a:t>
+            </a:r>
+            <a:r>
+              <a:rPr sz="1400" dirty="0">
+                <a:solidFill>
+                  <a:srgbClr val="2D2D2D"/>
+                </a:solidFill>
+                <a:latin typeface="Consolas"/>
+              </a:rPr>
+              <a:t>/deploy/rpm/  2&gt;/dev/null | head</a:t>
+            </a:r>
+          </a:p>
+          <a:p>
+            <a:pPr>
+              <a:spcAft>
+                <a:spcPts val="0"/>
+              </a:spcAft>
+            </a:pPr>
+            <a:r>
+              <a:rPr sz="1400" dirty="0">
+                <a:solidFill>
+                  <a:srgbClr val="2D2D2D"/>
+                </a:solidFill>
+                <a:latin typeface="Consolas"/>
+              </a:rPr>
+              <a:t>ls </a:t>
+            </a:r>
+            <a:r>
+              <a:rPr sz="1400" dirty="0" err="1">
+                <a:solidFill>
+                  <a:srgbClr val="2D2D2D"/>
+                </a:solidFill>
+                <a:latin typeface="Consolas"/>
+              </a:rPr>
+              <a:t>tmp</a:t>
+            </a:r>
+            <a:r>
+              <a:rPr sz="1400" dirty="0">
+                <a:solidFill>
+                  <a:srgbClr val="2D2D2D"/>
+                </a:solidFill>
+                <a:latin typeface="Consolas"/>
+              </a:rPr>
+              <a:t>/deploy/deb/  2&gt;/dev/null | head</a:t>
+            </a:r>
+          </a:p>
+          <a:p>
+            <a:pPr>
+              <a:spcAft>
+                <a:spcPts val="0"/>
+              </a:spcAft>
+            </a:pPr>
+            <a:r>
+              <a:rPr sz="1400" dirty="0">
+                <a:solidFill>
+                  <a:srgbClr val="2D2D2D"/>
+                </a:solidFill>
+                <a:latin typeface="Consolas"/>
+              </a:rPr>
               <a:t> </a:t>
             </a:r>
           </a:p>
@@ -7990,205 +7784,844 @@
               </a:spcAft>
             </a:pPr>
             <a:r>
-              <a:rPr sz="1000">
+              <a:rPr sz="1400" i="1" dirty="0">
+                <a:solidFill>
+                  <a:srgbClr val="808080"/>
+                </a:solidFill>
+                <a:latin typeface="Consolas"/>
+              </a:rPr>
+              <a:t># Compare image sizes between the two builds</a:t>
+            </a:r>
+          </a:p>
+          <a:p>
+            <a:pPr>
+              <a:spcAft>
+                <a:spcPts val="0"/>
+              </a:spcAft>
+            </a:pPr>
+            <a:r>
+              <a:rPr sz="1400" dirty="0">
                 <a:solidFill>
                   <a:srgbClr val="2D2D2D"/>
                 </a:solidFill>
                 <a:latin typeface="Consolas"/>
               </a:rPr>
-              <a:t>SRC_URI = "http://ftp.figlet.org/pub/figlet/program/unix/figlet-${PV}.tar.gz \</a:t>
-            </a:r>
-          </a:p>
-          <a:p>
-            <a:pPr>
-              <a:spcAft>
-                <a:spcPts val="0"/>
-              </a:spcAft>
-            </a:pPr>
-            <a:r>
-              <a:rPr sz="1000">
+              <a:t>du -</a:t>
+            </a:r>
+            <a:r>
+              <a:rPr sz="1400" dirty="0" err="1">
                 <a:solidFill>
                   <a:srgbClr val="2D2D2D"/>
                 </a:solidFill>
                 <a:latin typeface="Consolas"/>
               </a:rPr>
-              <a:t>           file://0001-banner-trainergw.patch"</a:t>
-            </a:r>
-          </a:p>
-          <a:p>
-            <a:pPr>
-              <a:spcAft>
-                <a:spcPts val="0"/>
-              </a:spcAft>
-            </a:pPr>
-            <a:r>
-              <a:rPr sz="1000">
+              <a:t>sh</a:t>
+            </a:r>
+            <a:r>
+              <a:rPr sz="1400" dirty="0">
                 <a:solidFill>
                   <a:srgbClr val="2D2D2D"/>
                 </a:solidFill>
                 <a:latin typeface="Consolas"/>
               </a:rPr>
-              <a:t>SRC_URI[sha256sum] = "bf88c40fd0f077dab2712f54f8d39ac952e4e9f2e1882f1195be9e5e4257417d"</a:t>
-            </a:r>
-          </a:p>
-          <a:p>
-            <a:pPr>
-              <a:spcAft>
-                <a:spcPts val="0"/>
-              </a:spcAft>
-            </a:pPr>
-            <a:r>
-              <a:rPr sz="1000">
+              <a:t> </a:t>
+            </a:r>
+            <a:r>
+              <a:rPr sz="1400" dirty="0" err="1">
                 <a:solidFill>
                   <a:srgbClr val="2D2D2D"/>
                 </a:solidFill>
                 <a:latin typeface="Consolas"/>
               </a:rPr>
-              <a:t> </a:t>
-            </a:r>
-          </a:p>
-          <a:p>
-            <a:pPr>
-              <a:spcAft>
-                <a:spcPts val="0"/>
-              </a:spcAft>
-            </a:pPr>
-            <a:r>
-              <a:rPr sz="1000">
+              <a:t>tmp</a:t>
+            </a:r>
+            <a:r>
+              <a:rPr sz="1400" dirty="0">
                 <a:solidFill>
                   <a:srgbClr val="2D2D2D"/>
                 </a:solidFill>
                 <a:latin typeface="Consolas"/>
               </a:rPr>
-              <a:t>S = "${WORKDIR}/figlet-${PV}"</a:t>
-            </a:r>
-          </a:p>
-          <a:p>
-            <a:pPr>
-              <a:spcAft>
-                <a:spcPts val="0"/>
-              </a:spcAft>
-            </a:pPr>
-            <a:r>
-              <a:rPr sz="1000">
-                <a:solidFill>
-                  <a:srgbClr val="2D2D2D"/>
-                </a:solidFill>
-                <a:latin typeface="Consolas"/>
-              </a:rPr>
-              <a:t> </a:t>
-            </a:r>
-          </a:p>
-          <a:p>
-            <a:pPr>
-              <a:spcAft>
-                <a:spcPts val="0"/>
-              </a:spcAft>
-            </a:pPr>
-            <a:r>
-              <a:rPr sz="1000">
-                <a:solidFill>
-                  <a:srgbClr val="2D2D2D"/>
-                </a:solidFill>
-                <a:latin typeface="Consolas"/>
-              </a:rPr>
-              <a:t>do_install() {</a:t>
-            </a:r>
-          </a:p>
-          <a:p>
-            <a:pPr>
-              <a:spcAft>
-                <a:spcPts val="0"/>
-              </a:spcAft>
-            </a:pPr>
-            <a:r>
-              <a:rPr sz="1000">
-                <a:solidFill>
-                  <a:srgbClr val="2D2D2D"/>
-                </a:solidFill>
-                <a:latin typeface="Consolas"/>
-              </a:rPr>
-              <a:t>    oe_runmake DESTDIR=${D} prefix=${prefix} install</a:t>
-            </a:r>
-          </a:p>
-          <a:p>
-            <a:pPr>
-              <a:spcAft>
-                <a:spcPts val="0"/>
-              </a:spcAft>
-            </a:pPr>
-            <a:r>
-              <a:rPr sz="1000">
-                <a:solidFill>
-                  <a:srgbClr val="2D2D2D"/>
-                </a:solidFill>
-                <a:latin typeface="Consolas"/>
-              </a:rPr>
-              <a:t>}</a:t>
-            </a:r>
-          </a:p>
-          <a:p>
-            <a:pPr>
-              <a:spcAft>
-                <a:spcPts val="0"/>
-              </a:spcAft>
-            </a:pPr>
-            <a:r>
-              <a:rPr sz="1000">
-                <a:solidFill>
-                  <a:srgbClr val="2D2D2D"/>
-                </a:solidFill>
-                <a:latin typeface="Consolas"/>
-              </a:rPr>
-              <a:t>EOF</a:t>
-            </a:r>
-          </a:p>
-          <a:p>
-            <a:pPr>
-              <a:spcAft>
-                <a:spcPts val="0"/>
-              </a:spcAft>
-            </a:pPr>
-            <a:r>
-              <a:rPr sz="1000">
-                <a:solidFill>
-                  <a:srgbClr val="2D2D2D"/>
-                </a:solidFill>
-                <a:latin typeface="Consolas"/>
-              </a:rPr>
-              <a:t> </a:t>
-            </a:r>
-          </a:p>
-          <a:p>
-            <a:pPr>
-              <a:spcAft>
-                <a:spcPts val="0"/>
-              </a:spcAft>
-            </a:pPr>
-            <a:r>
-              <a:rPr sz="1000" i="1">
-                <a:solidFill>
-                  <a:srgbClr val="808080"/>
-                </a:solidFill>
-                <a:latin typeface="Consolas"/>
-              </a:rPr>
-              <a:t># Add to image:</a:t>
-            </a:r>
-          </a:p>
-          <a:p>
-            <a:pPr>
-              <a:spcAft>
-                <a:spcPts val="0"/>
-              </a:spcAft>
-            </a:pPr>
-            <a:r>
-              <a:rPr sz="1000">
-                <a:solidFill>
-                  <a:srgbClr val="2D2D2D"/>
-                </a:solidFill>
-                <a:latin typeface="Consolas"/>
-              </a:rPr>
-              <a:t>echo 'IMAGE_INSTALL:append = " figlet"' &gt;&gt; conf/local.conf</a:t>
+              <a:t>/deploy/images/qemux86-64/core-image-base*ext4* 2&gt;/dev/null</a:t>
+            </a:r>
+          </a:p>
+        </p:txBody>
+      </p:sp>
+    </p:spTree>
+  </p:cSld>
+  <p:clrMapOvr>
+    <a:masterClrMapping/>
+  </p:clrMapOvr>
+</p:sld>
+</file>
+
+<file path=ppt/slides/slide7.xml><?xml version="1.0" encoding="utf-8"?>
+<p:sld xmlns:a="http://schemas.openxmlformats.org/drawingml/2006/main" xmlns:r="http://schemas.openxmlformats.org/officeDocument/2006/relationships" xmlns:p="http://schemas.openxmlformats.org/presentationml/2006/main">
+  <p:cSld>
+    <p:spTree>
+      <p:nvGrpSpPr>
+        <p:cNvPr id="1" name=""/>
+        <p:cNvGrpSpPr/>
+        <p:nvPr/>
+      </p:nvGrpSpPr>
+      <p:grpSpPr>
+        <a:xfrm>
+          <a:off x="0" y="0"/>
+          <a:ext cx="0" cy="0"/>
+          <a:chOff x="0" y="0"/>
+          <a:chExt cx="0" cy="0"/>
+        </a:xfrm>
+      </p:grpSpPr>
+      <p:sp>
+        <p:nvSpPr>
+          <p:cNvPr id="2" name="Title 1"/>
+          <p:cNvSpPr>
+            <a:spLocks noGrp="1"/>
+          </p:cNvSpPr>
+          <p:nvPr>
+            <p:ph type="title"/>
+          </p:nvPr>
+        </p:nvSpPr>
+        <p:spPr/>
+        <p:txBody>
+          <a:bodyPr/>
+          <a:lstStyle/>
+          <a:p>
+            <a:r>
+              <a:rPr sz="3200" b="1" dirty="0">
+                <a:latin typeface="Calibri"/>
+              </a:rPr>
+              <a:t>Session Summary</a:t>
+            </a:r>
+          </a:p>
+        </p:txBody>
+      </p:sp>
+      <p:sp>
+        <p:nvSpPr>
+          <p:cNvPr id="3" name="TextBox 2"/>
+          <p:cNvSpPr txBox="1"/>
+          <p:nvPr/>
+        </p:nvSpPr>
+        <p:spPr>
+          <a:xfrm>
+            <a:off x="822960" y="1417320"/>
+            <a:ext cx="10515600" cy="365760"/>
+          </a:xfrm>
+          <a:prstGeom prst="rect">
+            <a:avLst/>
+          </a:prstGeom>
+          <a:noFill/>
+        </p:spPr>
+        <p:txBody>
+          <a:bodyPr wrap="square" lIns="45720" rIns="45720" anchor="t">
+            <a:spAutoFit/>
+          </a:bodyPr>
+          <a:lstStyle/>
+          <a:p>
+            <a:pPr algn="l"/>
+            <a:r>
+              <a:rPr sz="1500" b="0" i="1">
+                <a:solidFill>
+                  <a:srgbClr val="666666"/>
+                </a:solidFill>
+                <a:latin typeface="Calibri"/>
+              </a:rPr>
+              <a:t>5 things to remember from this session.</a:t>
+            </a:r>
+          </a:p>
+        </p:txBody>
+      </p:sp>
+      <p:sp>
+        <p:nvSpPr>
+          <p:cNvPr id="4" name="Rounded Rectangle 3"/>
+          <p:cNvSpPr/>
+          <p:nvPr/>
+        </p:nvSpPr>
+        <p:spPr>
+          <a:xfrm>
+            <a:off x="822960" y="1874519"/>
+            <a:ext cx="457200" cy="548640"/>
+          </a:xfrm>
+          <a:prstGeom prst="roundRect">
+            <a:avLst/>
+          </a:prstGeom>
+          <a:solidFill>
+            <a:srgbClr val="CC0066"/>
+          </a:solidFill>
+          <a:ln>
+            <a:noFill/>
+          </a:ln>
+          <a:effectLst/>
+        </p:spPr>
+        <p:style>
+          <a:lnRef idx="1">
+            <a:schemeClr val="accent1"/>
+          </a:lnRef>
+          <a:fillRef idx="3">
+            <a:schemeClr val="accent1"/>
+          </a:fillRef>
+          <a:effectRef idx="2">
+            <a:schemeClr val="accent1"/>
+          </a:effectRef>
+          <a:fontRef idx="minor">
+            <a:schemeClr val="lt1"/>
+          </a:fontRef>
+        </p:style>
+        <p:txBody>
+          <a:bodyPr lIns="0" rIns="0" rtlCol="0" anchor="ctr"/>
+          <a:lstStyle/>
+          <a:p>
+            <a:pPr algn="ctr"/>
+            <a:r>
+              <a:rPr sz="2200" b="1">
+                <a:solidFill>
+                  <a:srgbClr val="FFFFFF"/>
+                </a:solidFill>
+                <a:latin typeface="Calibri"/>
+              </a:rPr>
+              <a:t>1</a:t>
+            </a:r>
+          </a:p>
+        </p:txBody>
+      </p:sp>
+      <p:sp>
+        <p:nvSpPr>
+          <p:cNvPr id="5" name="TextBox 4"/>
+          <p:cNvSpPr txBox="1"/>
+          <p:nvPr/>
+        </p:nvSpPr>
+        <p:spPr>
+          <a:xfrm>
+            <a:off x="1417320" y="1874519"/>
+            <a:ext cx="10058400" cy="320040"/>
+          </a:xfrm>
+          <a:prstGeom prst="rect">
+            <a:avLst/>
+          </a:prstGeom>
+          <a:noFill/>
+        </p:spPr>
+        <p:txBody>
+          <a:bodyPr wrap="square" lIns="45720" rIns="45720" anchor="t">
+            <a:spAutoFit/>
+          </a:bodyPr>
+          <a:lstStyle/>
+          <a:p>
+            <a:pPr algn="l"/>
+            <a:r>
+              <a:rPr sz="1600" b="1" i="0">
+                <a:solidFill>
+                  <a:srgbClr val="663399"/>
+                </a:solidFill>
+                <a:latin typeface="Calibri"/>
+              </a:rPr>
+              <a:t>You can write a new recipe in 5 minutes</a:t>
+            </a:r>
+          </a:p>
+        </p:txBody>
+      </p:sp>
+      <p:sp>
+        <p:nvSpPr>
+          <p:cNvPr id="6" name="TextBox 5"/>
+          <p:cNvSpPr txBox="1"/>
+          <p:nvPr/>
+        </p:nvSpPr>
+        <p:spPr>
+          <a:xfrm>
+            <a:off x="1417320" y="2185415"/>
+            <a:ext cx="10058400" cy="320040"/>
+          </a:xfrm>
+          <a:prstGeom prst="rect">
+            <a:avLst/>
+          </a:prstGeom>
+          <a:noFill/>
+        </p:spPr>
+        <p:txBody>
+          <a:bodyPr wrap="square" lIns="45720" rIns="45720" anchor="t">
+            <a:spAutoFit/>
+          </a:bodyPr>
+          <a:lstStyle/>
+          <a:p>
+            <a:pPr algn="l"/>
+            <a:r>
+              <a:rPr sz="1300" b="0" i="0">
+                <a:solidFill>
+                  <a:srgbClr val="333333"/>
+                </a:solidFill>
+                <a:latin typeface="Calibri"/>
+              </a:rPr>
+              <a:t>Pattern: SRC_URI + S + do_install + LICENSE — the rest is variations</a:t>
+            </a:r>
+          </a:p>
+        </p:txBody>
+      </p:sp>
+      <p:sp>
+        <p:nvSpPr>
+          <p:cNvPr id="7" name="Rounded Rectangle 6"/>
+          <p:cNvSpPr/>
+          <p:nvPr/>
+        </p:nvSpPr>
+        <p:spPr>
+          <a:xfrm>
+            <a:off x="822960" y="2587752"/>
+            <a:ext cx="457200" cy="548640"/>
+          </a:xfrm>
+          <a:prstGeom prst="roundRect">
+            <a:avLst/>
+          </a:prstGeom>
+          <a:solidFill>
+            <a:srgbClr val="CC0066"/>
+          </a:solidFill>
+          <a:ln>
+            <a:noFill/>
+          </a:ln>
+          <a:effectLst/>
+        </p:spPr>
+        <p:style>
+          <a:lnRef idx="1">
+            <a:schemeClr val="accent1"/>
+          </a:lnRef>
+          <a:fillRef idx="3">
+            <a:schemeClr val="accent1"/>
+          </a:fillRef>
+          <a:effectRef idx="2">
+            <a:schemeClr val="accent1"/>
+          </a:effectRef>
+          <a:fontRef idx="minor">
+            <a:schemeClr val="lt1"/>
+          </a:fontRef>
+        </p:style>
+        <p:txBody>
+          <a:bodyPr lIns="0" rIns="0" rtlCol="0" anchor="ctr"/>
+          <a:lstStyle/>
+          <a:p>
+            <a:pPr algn="ctr"/>
+            <a:r>
+              <a:rPr sz="2200" b="1">
+                <a:solidFill>
+                  <a:srgbClr val="FFFFFF"/>
+                </a:solidFill>
+                <a:latin typeface="Calibri"/>
+              </a:rPr>
+              <a:t>2</a:t>
+            </a:r>
+          </a:p>
+        </p:txBody>
+      </p:sp>
+      <p:sp>
+        <p:nvSpPr>
+          <p:cNvPr id="8" name="TextBox 7"/>
+          <p:cNvSpPr txBox="1"/>
+          <p:nvPr/>
+        </p:nvSpPr>
+        <p:spPr>
+          <a:xfrm>
+            <a:off x="1417320" y="2587752"/>
+            <a:ext cx="10058400" cy="320040"/>
+          </a:xfrm>
+          <a:prstGeom prst="rect">
+            <a:avLst/>
+          </a:prstGeom>
+          <a:noFill/>
+        </p:spPr>
+        <p:txBody>
+          <a:bodyPr wrap="square" lIns="45720" rIns="45720" anchor="t">
+            <a:spAutoFit/>
+          </a:bodyPr>
+          <a:lstStyle/>
+          <a:p>
+            <a:pPr algn="l"/>
+            <a:r>
+              <a:rPr sz="1600" b="1" i="0">
+                <a:solidFill>
+                  <a:srgbClr val="663399"/>
+                </a:solidFill>
+                <a:latin typeface="Calibri"/>
+              </a:rPr>
+              <a:t>Failures are diagnostic, not catastrophic</a:t>
+            </a:r>
+          </a:p>
+        </p:txBody>
+      </p:sp>
+      <p:sp>
+        <p:nvSpPr>
+          <p:cNvPr id="9" name="TextBox 8"/>
+          <p:cNvSpPr txBox="1"/>
+          <p:nvPr/>
+        </p:nvSpPr>
+        <p:spPr>
+          <a:xfrm>
+            <a:off x="1417320" y="2898648"/>
+            <a:ext cx="10058400" cy="320040"/>
+          </a:xfrm>
+          <a:prstGeom prst="rect">
+            <a:avLst/>
+          </a:prstGeom>
+          <a:noFill/>
+        </p:spPr>
+        <p:txBody>
+          <a:bodyPr wrap="square" lIns="45720" rIns="45720" anchor="t">
+            <a:spAutoFit/>
+          </a:bodyPr>
+          <a:lstStyle/>
+          <a:p>
+            <a:pPr algn="l"/>
+            <a:r>
+              <a:rPr sz="1300" b="0" i="0">
+                <a:solidFill>
+                  <a:srgbClr val="333333"/>
+                </a:solidFill>
+                <a:latin typeface="Calibri"/>
+              </a:rPr>
+              <a:t>log.do_*, devshell, and bitbake -c &lt;task&gt; -f are your daily tools</a:t>
+            </a:r>
+          </a:p>
+        </p:txBody>
+      </p:sp>
+      <p:sp>
+        <p:nvSpPr>
+          <p:cNvPr id="10" name="Rounded Rectangle 9"/>
+          <p:cNvSpPr/>
+          <p:nvPr/>
+        </p:nvSpPr>
+        <p:spPr>
+          <a:xfrm>
+            <a:off x="822960" y="3300984"/>
+            <a:ext cx="457200" cy="548640"/>
+          </a:xfrm>
+          <a:prstGeom prst="roundRect">
+            <a:avLst/>
+          </a:prstGeom>
+          <a:solidFill>
+            <a:srgbClr val="CC0066"/>
+          </a:solidFill>
+          <a:ln>
+            <a:noFill/>
+          </a:ln>
+          <a:effectLst/>
+        </p:spPr>
+        <p:style>
+          <a:lnRef idx="1">
+            <a:schemeClr val="accent1"/>
+          </a:lnRef>
+          <a:fillRef idx="3">
+            <a:schemeClr val="accent1"/>
+          </a:fillRef>
+          <a:effectRef idx="2">
+            <a:schemeClr val="accent1"/>
+          </a:effectRef>
+          <a:fontRef idx="minor">
+            <a:schemeClr val="lt1"/>
+          </a:fontRef>
+        </p:style>
+        <p:txBody>
+          <a:bodyPr lIns="0" rIns="0" rtlCol="0" anchor="ctr"/>
+          <a:lstStyle/>
+          <a:p>
+            <a:pPr algn="ctr"/>
+            <a:r>
+              <a:rPr sz="2200" b="1">
+                <a:solidFill>
+                  <a:srgbClr val="FFFFFF"/>
+                </a:solidFill>
+                <a:latin typeface="Calibri"/>
+              </a:rPr>
+              <a:t>3</a:t>
+            </a:r>
+          </a:p>
+        </p:txBody>
+      </p:sp>
+      <p:sp>
+        <p:nvSpPr>
+          <p:cNvPr id="11" name="TextBox 10"/>
+          <p:cNvSpPr txBox="1"/>
+          <p:nvPr/>
+        </p:nvSpPr>
+        <p:spPr>
+          <a:xfrm>
+            <a:off x="1417320" y="3300984"/>
+            <a:ext cx="10058400" cy="320040"/>
+          </a:xfrm>
+          <a:prstGeom prst="rect">
+            <a:avLst/>
+          </a:prstGeom>
+          <a:noFill/>
+        </p:spPr>
+        <p:txBody>
+          <a:bodyPr wrap="square" lIns="45720" rIns="45720" anchor="t">
+            <a:spAutoFit/>
+          </a:bodyPr>
+          <a:lstStyle/>
+          <a:p>
+            <a:pPr algn="l"/>
+            <a:r>
+              <a:rPr sz="1600" b="1" i="0">
+                <a:solidFill>
+                  <a:srgbClr val="663399"/>
+                </a:solidFill>
+                <a:latin typeface="Calibri"/>
+              </a:rPr>
+              <a:t>sstate is observable</a:t>
+            </a:r>
+          </a:p>
+        </p:txBody>
+      </p:sp>
+      <p:sp>
+        <p:nvSpPr>
+          <p:cNvPr id="12" name="TextBox 11"/>
+          <p:cNvSpPr txBox="1"/>
+          <p:nvPr/>
+        </p:nvSpPr>
+        <p:spPr>
+          <a:xfrm>
+            <a:off x="1417320" y="3611879"/>
+            <a:ext cx="10058400" cy="320040"/>
+          </a:xfrm>
+          <a:prstGeom prst="rect">
+            <a:avLst/>
+          </a:prstGeom>
+          <a:noFill/>
+        </p:spPr>
+        <p:txBody>
+          <a:bodyPr wrap="square" lIns="45720" rIns="45720" anchor="t">
+            <a:spAutoFit/>
+          </a:bodyPr>
+          <a:lstStyle/>
+          <a:p>
+            <a:pPr algn="l"/>
+            <a:r>
+              <a:rPr sz="1300" b="0" i="0">
+                <a:solidFill>
+                  <a:srgbClr val="333333"/>
+                </a:solidFill>
+                <a:latin typeface="Calibri"/>
+              </a:rPr>
+              <a:t>bitbake -S printdiff and bitbake-diffsigs show exactly what changed</a:t>
+            </a:r>
+          </a:p>
+        </p:txBody>
+      </p:sp>
+      <p:sp>
+        <p:nvSpPr>
+          <p:cNvPr id="13" name="Rounded Rectangle 12"/>
+          <p:cNvSpPr/>
+          <p:nvPr/>
+        </p:nvSpPr>
+        <p:spPr>
+          <a:xfrm>
+            <a:off x="822960" y="4014215"/>
+            <a:ext cx="457200" cy="548640"/>
+          </a:xfrm>
+          <a:prstGeom prst="roundRect">
+            <a:avLst/>
+          </a:prstGeom>
+          <a:solidFill>
+            <a:srgbClr val="CC0066"/>
+          </a:solidFill>
+          <a:ln>
+            <a:noFill/>
+          </a:ln>
+          <a:effectLst/>
+        </p:spPr>
+        <p:style>
+          <a:lnRef idx="1">
+            <a:schemeClr val="accent1"/>
+          </a:lnRef>
+          <a:fillRef idx="3">
+            <a:schemeClr val="accent1"/>
+          </a:fillRef>
+          <a:effectRef idx="2">
+            <a:schemeClr val="accent1"/>
+          </a:effectRef>
+          <a:fontRef idx="minor">
+            <a:schemeClr val="lt1"/>
+          </a:fontRef>
+        </p:style>
+        <p:txBody>
+          <a:bodyPr lIns="0" rIns="0" rtlCol="0" anchor="ctr"/>
+          <a:lstStyle/>
+          <a:p>
+            <a:pPr algn="ctr"/>
+            <a:r>
+              <a:rPr sz="2200" b="1">
+                <a:solidFill>
+                  <a:srgbClr val="FFFFFF"/>
+                </a:solidFill>
+                <a:latin typeface="Calibri"/>
+              </a:rPr>
+              <a:t>4</a:t>
+            </a:r>
+          </a:p>
+        </p:txBody>
+      </p:sp>
+      <p:sp>
+        <p:nvSpPr>
+          <p:cNvPr id="14" name="TextBox 13"/>
+          <p:cNvSpPr txBox="1"/>
+          <p:nvPr/>
+        </p:nvSpPr>
+        <p:spPr>
+          <a:xfrm>
+            <a:off x="1417320" y="4014215"/>
+            <a:ext cx="10058400" cy="320040"/>
+          </a:xfrm>
+          <a:prstGeom prst="rect">
+            <a:avLst/>
+          </a:prstGeom>
+          <a:noFill/>
+        </p:spPr>
+        <p:txBody>
+          <a:bodyPr wrap="square" lIns="45720" rIns="45720" anchor="t">
+            <a:spAutoFit/>
+          </a:bodyPr>
+          <a:lstStyle/>
+          <a:p>
+            <a:pPr algn="l"/>
+            <a:r>
+              <a:rPr sz="1600" b="1" i="0">
+                <a:solidFill>
+                  <a:srgbClr val="663399"/>
+                </a:solidFill>
+                <a:latin typeface="Calibri"/>
+              </a:rPr>
+              <a:t>PACKAGE_CLASSES is a one-line switch</a:t>
+            </a:r>
+          </a:p>
+        </p:txBody>
+      </p:sp>
+      <p:sp>
+        <p:nvSpPr>
+          <p:cNvPr id="15" name="TextBox 14"/>
+          <p:cNvSpPr txBox="1"/>
+          <p:nvPr/>
+        </p:nvSpPr>
+        <p:spPr>
+          <a:xfrm>
+            <a:off x="1417320" y="4325112"/>
+            <a:ext cx="10058400" cy="320040"/>
+          </a:xfrm>
+          <a:prstGeom prst="rect">
+            <a:avLst/>
+          </a:prstGeom>
+          <a:noFill/>
+        </p:spPr>
+        <p:txBody>
+          <a:bodyPr wrap="square" lIns="45720" rIns="45720" anchor="t">
+            <a:spAutoFit/>
+          </a:bodyPr>
+          <a:lstStyle/>
+          <a:p>
+            <a:pPr algn="l"/>
+            <a:r>
+              <a:rPr sz="1300" b="0" i="0">
+                <a:solidFill>
+                  <a:srgbClr val="333333"/>
+                </a:solidFill>
+                <a:latin typeface="Calibri"/>
+              </a:rPr>
+              <a:t>But it cascades through the whole package set — observe sstate behavior</a:t>
+            </a:r>
+          </a:p>
+        </p:txBody>
+      </p:sp>
+      <p:sp>
+        <p:nvSpPr>
+          <p:cNvPr id="16" name="Rounded Rectangle 15"/>
+          <p:cNvSpPr/>
+          <p:nvPr/>
+        </p:nvSpPr>
+        <p:spPr>
+          <a:xfrm>
+            <a:off x="822960" y="4727448"/>
+            <a:ext cx="457200" cy="548640"/>
+          </a:xfrm>
+          <a:prstGeom prst="roundRect">
+            <a:avLst/>
+          </a:prstGeom>
+          <a:solidFill>
+            <a:srgbClr val="CC0066"/>
+          </a:solidFill>
+          <a:ln>
+            <a:noFill/>
+          </a:ln>
+          <a:effectLst/>
+        </p:spPr>
+        <p:style>
+          <a:lnRef idx="1">
+            <a:schemeClr val="accent1"/>
+          </a:lnRef>
+          <a:fillRef idx="3">
+            <a:schemeClr val="accent1"/>
+          </a:fillRef>
+          <a:effectRef idx="2">
+            <a:schemeClr val="accent1"/>
+          </a:effectRef>
+          <a:fontRef idx="minor">
+            <a:schemeClr val="lt1"/>
+          </a:fontRef>
+        </p:style>
+        <p:txBody>
+          <a:bodyPr lIns="0" rIns="0" rtlCol="0" anchor="ctr"/>
+          <a:lstStyle/>
+          <a:p>
+            <a:pPr algn="ctr"/>
+            <a:r>
+              <a:rPr sz="2200" b="1">
+                <a:solidFill>
+                  <a:srgbClr val="FFFFFF"/>
+                </a:solidFill>
+                <a:latin typeface="Calibri"/>
+              </a:rPr>
+              <a:t>5</a:t>
+            </a:r>
+          </a:p>
+        </p:txBody>
+      </p:sp>
+      <p:sp>
+        <p:nvSpPr>
+          <p:cNvPr id="17" name="TextBox 16"/>
+          <p:cNvSpPr txBox="1"/>
+          <p:nvPr/>
+        </p:nvSpPr>
+        <p:spPr>
+          <a:xfrm>
+            <a:off x="1417320" y="4727448"/>
+            <a:ext cx="10058400" cy="320040"/>
+          </a:xfrm>
+          <a:prstGeom prst="rect">
+            <a:avLst/>
+          </a:prstGeom>
+          <a:noFill/>
+        </p:spPr>
+        <p:txBody>
+          <a:bodyPr wrap="square" lIns="45720" rIns="45720" anchor="t">
+            <a:spAutoFit/>
+          </a:bodyPr>
+          <a:lstStyle/>
+          <a:p>
+            <a:pPr algn="l"/>
+            <a:r>
+              <a:rPr sz="1600" b="1" i="0">
+                <a:solidFill>
+                  <a:srgbClr val="663399"/>
+                </a:solidFill>
+                <a:latin typeface="Calibri"/>
+              </a:rPr>
+              <a:t>You're done with the Yocto-engineering half of the course</a:t>
+            </a:r>
+          </a:p>
+        </p:txBody>
+      </p:sp>
+      <p:sp>
+        <p:nvSpPr>
+          <p:cNvPr id="18" name="TextBox 17"/>
+          <p:cNvSpPr txBox="1"/>
+          <p:nvPr/>
+        </p:nvSpPr>
+        <p:spPr>
+          <a:xfrm>
+            <a:off x="1417320" y="5038344"/>
+            <a:ext cx="10058400" cy="320040"/>
+          </a:xfrm>
+          <a:prstGeom prst="rect">
+            <a:avLst/>
+          </a:prstGeom>
+          <a:noFill/>
+        </p:spPr>
+        <p:txBody>
+          <a:bodyPr wrap="square" lIns="45720" rIns="45720" anchor="t">
+            <a:spAutoFit/>
+          </a:bodyPr>
+          <a:lstStyle/>
+          <a:p>
+            <a:pPr algn="l"/>
+            <a:r>
+              <a:rPr sz="1300" b="0" i="0">
+                <a:solidFill>
+                  <a:srgbClr val="333333"/>
+                </a:solidFill>
+                <a:latin typeface="Calibri"/>
+              </a:rPr>
+              <a:t>Day 3 moves to productization: hardening, compliance, CVE, SBOM, QA</a:t>
+            </a:r>
+          </a:p>
+        </p:txBody>
+      </p:sp>
+      <p:sp>
+        <p:nvSpPr>
+          <p:cNvPr id="19" name="Rounded Rectangle 18"/>
+          <p:cNvSpPr/>
+          <p:nvPr/>
+        </p:nvSpPr>
+        <p:spPr>
+          <a:xfrm>
+            <a:off x="822960" y="5669280"/>
+            <a:ext cx="10561320" cy="640080"/>
+          </a:xfrm>
+          <a:prstGeom prst="roundRect">
+            <a:avLst/>
+          </a:prstGeom>
+          <a:solidFill>
+            <a:srgbClr val="FBE6F0"/>
+          </a:solidFill>
+          <a:ln>
+            <a:noFill/>
+          </a:ln>
+          <a:effectLst/>
+        </p:spPr>
+        <p:style>
+          <a:lnRef idx="1">
+            <a:schemeClr val="accent1"/>
+          </a:lnRef>
+          <a:fillRef idx="3">
+            <a:schemeClr val="accent1"/>
+          </a:fillRef>
+          <a:effectRef idx="2">
+            <a:schemeClr val="accent1"/>
+          </a:effectRef>
+          <a:fontRef idx="minor">
+            <a:schemeClr val="lt1"/>
+          </a:fontRef>
+        </p:style>
+        <p:txBody>
+          <a:bodyPr lIns="228600" rtlCol="0" anchor="ctr"/>
+          <a:lstStyle/>
+          <a:p>
+            <a:pPr algn="ctr"/>
+            <a:r>
+              <a:rPr sz="1400" b="1" dirty="0">
+                <a:solidFill>
+                  <a:srgbClr val="663399"/>
+                </a:solidFill>
+                <a:latin typeface="Calibri"/>
+              </a:rPr>
+              <a:t>Next session  →  </a:t>
+            </a:r>
+            <a:r>
+              <a:rPr sz="1400" dirty="0">
+                <a:solidFill>
+                  <a:srgbClr val="333333"/>
+                </a:solidFill>
+                <a:latin typeface="Calibri"/>
+              </a:rPr>
+              <a:t>Day 3</a:t>
+            </a:r>
+            <a:r>
+              <a:rPr lang="en-IN" sz="1400">
+                <a:solidFill>
+                  <a:srgbClr val="333333"/>
+                </a:solidFill>
+                <a:latin typeface="Calibri"/>
+              </a:rPr>
+              <a:t>: </a:t>
+            </a:r>
+            <a:r>
+              <a:rPr sz="1400">
+                <a:solidFill>
+                  <a:srgbClr val="333333"/>
+                </a:solidFill>
+                <a:latin typeface="Calibri"/>
+              </a:rPr>
+              <a:t>Hardening, DT debugging, compliance, CVE/SBOM/QA</a:t>
             </a:r>
           </a:p>
         </p:txBody>
